--- a/media/module1/slides.pptx
+++ b/media/module1/slides.pptx
@@ -26,6 +26,21 @@
     <p:sldId id="274" r:id="rId26"/>
     <p:sldId id="275" r:id="rId27"/>
     <p:sldId id="276" r:id="rId28"/>
+    <p:sldId id="277" r:id="rId29"/>
+    <p:sldId id="278" r:id="rId30"/>
+    <p:sldId id="279" r:id="rId31"/>
+    <p:sldId id="280" r:id="rId32"/>
+    <p:sldId id="281" r:id="rId33"/>
+    <p:sldId id="282" r:id="rId34"/>
+    <p:sldId id="283" r:id="rId35"/>
+    <p:sldId id="284" r:id="rId36"/>
+    <p:sldId id="285" r:id="rId37"/>
+    <p:sldId id="286" r:id="rId38"/>
+    <p:sldId id="287" r:id="rId39"/>
+    <p:sldId id="288" r:id="rId40"/>
+    <p:sldId id="289" r:id="rId41"/>
+    <p:sldId id="290" r:id="rId42"/>
+    <p:sldId id="291" r:id="rId43"/>
   </p:sldIdLst>
   <p:sldSz cx="12191695" cy="6858000" type="screen4x3"/>
   <p:notesSz cx="6858000" cy="9144000"/>
@@ -522,7 +537,567 @@
           <a:lstStyle/>
           <a:p>
             <a:r>
+              <a:t>From docs/MODULE1.md — read guides before running demos.</a:t>
+            </a:r>
+          </a:p>
+        </p:txBody>
+      </p:sp>
+      <p:sp>
+        <p:nvSpPr>
+          <p:cNvPr id="4" name="Slide Number Placeholder 3"/>
+          <p:cNvSpPr>
+            <a:spLocks noGrp="1"/>
+          </p:cNvSpPr>
+          <p:nvPr>
+            <p:ph type="sldNum" idx="5" sz="quarter"/>
+          </p:nvPr>
+        </p:nvSpPr>
+        <p:spPr/>
+      </p:sp>
+    </p:spTree>
+  </p:cSld>
+  <p:clrMapOvr>
+    <a:masterClrMapping/>
+  </p:clrMapOvr>
+</p:notes>
+</file>
+
+<file path=ppt/notesSlides/notesSlide10.xml><?xml version="1.0" encoding="utf-8"?>
+<p:notes xmlns:a="http://schemas.openxmlformats.org/drawingml/2006/main" xmlns:p="http://schemas.openxmlformats.org/presentationml/2006/main" xmlns:r="http://schemas.openxmlformats.org/officeDocument/2006/relationships">
+  <p:cSld>
+    <p:spTree>
+      <p:nvGrpSpPr>
+        <p:cNvPr id="1" name=""/>
+        <p:cNvGrpSpPr/>
+        <p:nvPr/>
+      </p:nvGrpSpPr>
+      <p:grpSpPr>
+        <a:xfrm>
+          <a:off x="0" y="0"/>
+          <a:ext cx="0" cy="0"/>
+          <a:chOff x="0" y="0"/>
+          <a:chExt cx="0" cy="0"/>
+        </a:xfrm>
+      </p:grpSpPr>
+      <p:sp>
+        <p:nvSpPr>
+          <p:cNvPr id="2" name="Slide Image Placeholder 1"/>
+          <p:cNvSpPr>
+            <a:spLocks noGrp="1"/>
+          </p:cNvSpPr>
+          <p:nvPr>
+            <p:ph type="sldImg" idx="2"/>
+          </p:nvPr>
+        </p:nvSpPr>
+        <p:spPr/>
+      </p:sp>
+      <p:sp>
+        <p:nvSpPr>
+          <p:cNvPr id="3" name="Notes Placeholder 2"/>
+          <p:cNvSpPr>
+            <a:spLocks noGrp="1"/>
+          </p:cNvSpPr>
+          <p:nvPr>
+            <p:ph type="body" idx="3" sz="quarter"/>
+          </p:nvPr>
+        </p:nvSpPr>
+        <p:spPr/>
+        <p:txBody>
+          <a:bodyPr/>
+          <a:lstStyle/>
+          <a:p>
+            <a:r>
               <a:t>From MODULE1 Topics Covered.</a:t>
+            </a:r>
+          </a:p>
+        </p:txBody>
+      </p:sp>
+      <p:sp>
+        <p:nvSpPr>
+          <p:cNvPr id="4" name="Slide Number Placeholder 3"/>
+          <p:cNvSpPr>
+            <a:spLocks noGrp="1"/>
+          </p:cNvSpPr>
+          <p:nvPr>
+            <p:ph type="sldNum" idx="5" sz="quarter"/>
+          </p:nvPr>
+        </p:nvSpPr>
+        <p:spPr/>
+      </p:sp>
+    </p:spTree>
+  </p:cSld>
+  <p:clrMapOvr>
+    <a:masterClrMapping/>
+  </p:clrMapOvr>
+</p:notes>
+</file>
+
+<file path=ppt/notesSlides/notesSlide11.xml><?xml version="1.0" encoding="utf-8"?>
+<p:notes xmlns:a="http://schemas.openxmlformats.org/drawingml/2006/main" xmlns:p="http://schemas.openxmlformats.org/presentationml/2006/main" xmlns:r="http://schemas.openxmlformats.org/officeDocument/2006/relationships">
+  <p:cSld>
+    <p:spTree>
+      <p:nvGrpSpPr>
+        <p:cNvPr id="1" name=""/>
+        <p:cNvGrpSpPr/>
+        <p:nvPr/>
+      </p:nvGrpSpPr>
+      <p:grpSpPr>
+        <a:xfrm>
+          <a:off x="0" y="0"/>
+          <a:ext cx="0" cy="0"/>
+          <a:chOff x="0" y="0"/>
+          <a:chExt cx="0" cy="0"/>
+        </a:xfrm>
+      </p:grpSpPr>
+      <p:sp>
+        <p:nvSpPr>
+          <p:cNvPr id="2" name="Slide Image Placeholder 1"/>
+          <p:cNvSpPr>
+            <a:spLocks noGrp="1"/>
+          </p:cNvSpPr>
+          <p:nvPr>
+            <p:ph type="sldImg" idx="2"/>
+          </p:nvPr>
+        </p:nvSpPr>
+        <p:spPr/>
+      </p:sp>
+      <p:sp>
+        <p:nvSpPr>
+          <p:cNvPr id="3" name="Notes Placeholder 2"/>
+          <p:cNvSpPr>
+            <a:spLocks noGrp="1"/>
+          </p:cNvSpPr>
+          <p:nvPr>
+            <p:ph type="body" idx="3" sz="quarter"/>
+          </p:nvPr>
+        </p:nvSpPr>
+        <p:spPr/>
+        <p:txBody>
+          <a:bodyPr/>
+          <a:lstStyle/>
+          <a:p>
+            <a:r>
+              <a:t>Full detail in docs/MODULE1.md command reference.</a:t>
+            </a:r>
+          </a:p>
+        </p:txBody>
+      </p:sp>
+      <p:sp>
+        <p:nvSpPr>
+          <p:cNvPr id="4" name="Slide Number Placeholder 3"/>
+          <p:cNvSpPr>
+            <a:spLocks noGrp="1"/>
+          </p:cNvSpPr>
+          <p:nvPr>
+            <p:ph type="sldNum" idx="5" sz="quarter"/>
+          </p:nvPr>
+        </p:nvSpPr>
+        <p:spPr/>
+      </p:sp>
+    </p:spTree>
+  </p:cSld>
+  <p:clrMapOvr>
+    <a:masterClrMapping/>
+  </p:clrMapOvr>
+</p:notes>
+</file>
+
+<file path=ppt/notesSlides/notesSlide12.xml><?xml version="1.0" encoding="utf-8"?>
+<p:notes xmlns:a="http://schemas.openxmlformats.org/drawingml/2006/main" xmlns:p="http://schemas.openxmlformats.org/presentationml/2006/main" xmlns:r="http://schemas.openxmlformats.org/officeDocument/2006/relationships">
+  <p:cSld>
+    <p:spTree>
+      <p:nvGrpSpPr>
+        <p:cNvPr id="1" name=""/>
+        <p:cNvGrpSpPr/>
+        <p:nvPr/>
+      </p:nvGrpSpPr>
+      <p:grpSpPr>
+        <a:xfrm>
+          <a:off x="0" y="0"/>
+          <a:ext cx="0" cy="0"/>
+          <a:chOff x="0" y="0"/>
+          <a:chExt cx="0" cy="0"/>
+        </a:xfrm>
+      </p:grpSpPr>
+      <p:sp>
+        <p:nvSpPr>
+          <p:cNvPr id="2" name="Slide Image Placeholder 1"/>
+          <p:cNvSpPr>
+            <a:spLocks noGrp="1"/>
+          </p:cNvSpPr>
+          <p:nvPr>
+            <p:ph type="sldImg" idx="2"/>
+          </p:nvPr>
+        </p:nvSpPr>
+        <p:spPr/>
+      </p:sp>
+      <p:sp>
+        <p:nvSpPr>
+          <p:cNvPr id="3" name="Notes Placeholder 2"/>
+          <p:cNvSpPr>
+            <a:spLocks noGrp="1"/>
+          </p:cNvSpPr>
+          <p:nvPr>
+            <p:ph type="body" idx="3" sz="quarter"/>
+          </p:nvPr>
+        </p:nvSpPr>
+        <p:spPr/>
+        <p:txBody>
+          <a:bodyPr/>
+          <a:lstStyle/>
+          <a:p>
+            <a:r>
+              <a:t>Full detail in docs/MODULE1.md command reference.</a:t>
+            </a:r>
+          </a:p>
+        </p:txBody>
+      </p:sp>
+      <p:sp>
+        <p:nvSpPr>
+          <p:cNvPr id="4" name="Slide Number Placeholder 3"/>
+          <p:cNvSpPr>
+            <a:spLocks noGrp="1"/>
+          </p:cNvSpPr>
+          <p:nvPr>
+            <p:ph type="sldNum" idx="5" sz="quarter"/>
+          </p:nvPr>
+        </p:nvSpPr>
+        <p:spPr/>
+      </p:sp>
+    </p:spTree>
+  </p:cSld>
+  <p:clrMapOvr>
+    <a:masterClrMapping/>
+  </p:clrMapOvr>
+</p:notes>
+</file>
+
+<file path=ppt/notesSlides/notesSlide13.xml><?xml version="1.0" encoding="utf-8"?>
+<p:notes xmlns:a="http://schemas.openxmlformats.org/drawingml/2006/main" xmlns:p="http://schemas.openxmlformats.org/presentationml/2006/main" xmlns:r="http://schemas.openxmlformats.org/officeDocument/2006/relationships">
+  <p:cSld>
+    <p:spTree>
+      <p:nvGrpSpPr>
+        <p:cNvPr id="1" name=""/>
+        <p:cNvGrpSpPr/>
+        <p:nvPr/>
+      </p:nvGrpSpPr>
+      <p:grpSpPr>
+        <a:xfrm>
+          <a:off x="0" y="0"/>
+          <a:ext cx="0" cy="0"/>
+          <a:chOff x="0" y="0"/>
+          <a:chExt cx="0" cy="0"/>
+        </a:xfrm>
+      </p:grpSpPr>
+      <p:sp>
+        <p:nvSpPr>
+          <p:cNvPr id="2" name="Slide Image Placeholder 1"/>
+          <p:cNvSpPr>
+            <a:spLocks noGrp="1"/>
+          </p:cNvSpPr>
+          <p:nvPr>
+            <p:ph type="sldImg" idx="2"/>
+          </p:nvPr>
+        </p:nvSpPr>
+        <p:spPr/>
+      </p:sp>
+      <p:sp>
+        <p:nvSpPr>
+          <p:cNvPr id="3" name="Notes Placeholder 2"/>
+          <p:cNvSpPr>
+            <a:spLocks noGrp="1"/>
+          </p:cNvSpPr>
+          <p:nvPr>
+            <p:ph type="body" idx="3" sz="quarter"/>
+          </p:nvPr>
+        </p:nvSpPr>
+        <p:spPr/>
+        <p:txBody>
+          <a:bodyPr/>
+          <a:lstStyle/>
+          <a:p>
+            <a:r>
+              <a:t>Full detail in docs/MODULE1.md command reference.</a:t>
+            </a:r>
+          </a:p>
+        </p:txBody>
+      </p:sp>
+      <p:sp>
+        <p:nvSpPr>
+          <p:cNvPr id="4" name="Slide Number Placeholder 3"/>
+          <p:cNvSpPr>
+            <a:spLocks noGrp="1"/>
+          </p:cNvSpPr>
+          <p:nvPr>
+            <p:ph type="sldNum" idx="5" sz="quarter"/>
+          </p:nvPr>
+        </p:nvSpPr>
+        <p:spPr/>
+      </p:sp>
+    </p:spTree>
+  </p:cSld>
+  <p:clrMapOvr>
+    <a:masterClrMapping/>
+  </p:clrMapOvr>
+</p:notes>
+</file>
+
+<file path=ppt/notesSlides/notesSlide14.xml><?xml version="1.0" encoding="utf-8"?>
+<p:notes xmlns:a="http://schemas.openxmlformats.org/drawingml/2006/main" xmlns:p="http://schemas.openxmlformats.org/presentationml/2006/main" xmlns:r="http://schemas.openxmlformats.org/officeDocument/2006/relationships">
+  <p:cSld>
+    <p:spTree>
+      <p:nvGrpSpPr>
+        <p:cNvPr id="1" name=""/>
+        <p:cNvGrpSpPr/>
+        <p:nvPr/>
+      </p:nvGrpSpPr>
+      <p:grpSpPr>
+        <a:xfrm>
+          <a:off x="0" y="0"/>
+          <a:ext cx="0" cy="0"/>
+          <a:chOff x="0" y="0"/>
+          <a:chExt cx="0" cy="0"/>
+        </a:xfrm>
+      </p:grpSpPr>
+      <p:sp>
+        <p:nvSpPr>
+          <p:cNvPr id="2" name="Slide Image Placeholder 1"/>
+          <p:cNvSpPr>
+            <a:spLocks noGrp="1"/>
+          </p:cNvSpPr>
+          <p:nvPr>
+            <p:ph type="sldImg" idx="2"/>
+          </p:nvPr>
+        </p:nvSpPr>
+        <p:spPr/>
+      </p:sp>
+      <p:sp>
+        <p:nvSpPr>
+          <p:cNvPr id="3" name="Notes Placeholder 2"/>
+          <p:cNvSpPr>
+            <a:spLocks noGrp="1"/>
+          </p:cNvSpPr>
+          <p:nvPr>
+            <p:ph type="body" idx="3" sz="quarter"/>
+          </p:nvPr>
+        </p:nvSpPr>
+        <p:spPr/>
+        <p:txBody>
+          <a:bodyPr/>
+          <a:lstStyle/>
+          <a:p>
+            <a:r>
+              <a:t>Run from course repository root.</a:t>
+            </a:r>
+          </a:p>
+        </p:txBody>
+      </p:sp>
+      <p:sp>
+        <p:nvSpPr>
+          <p:cNvPr id="4" name="Slide Number Placeholder 3"/>
+          <p:cNvSpPr>
+            <a:spLocks noGrp="1"/>
+          </p:cNvSpPr>
+          <p:nvPr>
+            <p:ph type="sldNum" idx="5" sz="quarter"/>
+          </p:nvPr>
+        </p:nvSpPr>
+        <p:spPr/>
+      </p:sp>
+    </p:spTree>
+  </p:cSld>
+  <p:clrMapOvr>
+    <a:masterClrMapping/>
+  </p:clrMapOvr>
+</p:notes>
+</file>
+
+<file path=ppt/notesSlides/notesSlide15.xml><?xml version="1.0" encoding="utf-8"?>
+<p:notes xmlns:a="http://schemas.openxmlformats.org/drawingml/2006/main" xmlns:p="http://schemas.openxmlformats.org/presentationml/2006/main" xmlns:r="http://schemas.openxmlformats.org/officeDocument/2006/relationships">
+  <p:cSld>
+    <p:spTree>
+      <p:nvGrpSpPr>
+        <p:cNvPr id="1" name=""/>
+        <p:cNvGrpSpPr/>
+        <p:nvPr/>
+      </p:nvGrpSpPr>
+      <p:grpSpPr>
+        <a:xfrm>
+          <a:off x="0" y="0"/>
+          <a:ext cx="0" cy="0"/>
+          <a:chOff x="0" y="0"/>
+          <a:chExt cx="0" cy="0"/>
+        </a:xfrm>
+      </p:grpSpPr>
+      <p:sp>
+        <p:nvSpPr>
+          <p:cNvPr id="2" name="Slide Image Placeholder 1"/>
+          <p:cNvSpPr>
+            <a:spLocks noGrp="1"/>
+          </p:cNvSpPr>
+          <p:nvPr>
+            <p:ph type="sldImg" idx="2"/>
+          </p:nvPr>
+        </p:nvSpPr>
+        <p:spPr/>
+      </p:sp>
+      <p:sp>
+        <p:nvSpPr>
+          <p:cNvPr id="3" name="Notes Placeholder 2"/>
+          <p:cNvSpPr>
+            <a:spLocks noGrp="1"/>
+          </p:cNvSpPr>
+          <p:nvPr>
+            <p:ph type="body" idx="3" sz="quarter"/>
+          </p:nvPr>
+        </p:nvSpPr>
+        <p:spPr/>
+        <p:txBody>
+          <a:bodyPr/>
+          <a:lstStyle/>
+          <a:p>
+            <a:r>
+              <a:t>module1/examples/examples/spec_to_rtl/README.md</a:t>
+            </a:r>
+          </a:p>
+        </p:txBody>
+      </p:sp>
+      <p:sp>
+        <p:nvSpPr>
+          <p:cNvPr id="4" name="Slide Number Placeholder 3"/>
+          <p:cNvSpPr>
+            <a:spLocks noGrp="1"/>
+          </p:cNvSpPr>
+          <p:nvPr>
+            <p:ph type="sldNum" idx="5" sz="quarter"/>
+          </p:nvPr>
+        </p:nvSpPr>
+        <p:spPr/>
+      </p:sp>
+    </p:spTree>
+  </p:cSld>
+  <p:clrMapOvr>
+    <a:masterClrMapping/>
+  </p:clrMapOvr>
+</p:notes>
+</file>
+
+<file path=ppt/notesSlides/notesSlide16.xml><?xml version="1.0" encoding="utf-8"?>
+<p:notes xmlns:a="http://schemas.openxmlformats.org/drawingml/2006/main" xmlns:p="http://schemas.openxmlformats.org/presentationml/2006/main" xmlns:r="http://schemas.openxmlformats.org/officeDocument/2006/relationships">
+  <p:cSld>
+    <p:spTree>
+      <p:nvGrpSpPr>
+        <p:cNvPr id="1" name=""/>
+        <p:cNvGrpSpPr/>
+        <p:nvPr/>
+      </p:nvGrpSpPr>
+      <p:grpSpPr>
+        <a:xfrm>
+          <a:off x="0" y="0"/>
+          <a:ext cx="0" cy="0"/>
+          <a:chOff x="0" y="0"/>
+          <a:chExt cx="0" cy="0"/>
+        </a:xfrm>
+      </p:grpSpPr>
+      <p:sp>
+        <p:nvSpPr>
+          <p:cNvPr id="2" name="Slide Image Placeholder 1"/>
+          <p:cNvSpPr>
+            <a:spLocks noGrp="1"/>
+          </p:cNvSpPr>
+          <p:nvPr>
+            <p:ph type="sldImg" idx="2"/>
+          </p:nvPr>
+        </p:nvSpPr>
+        <p:spPr/>
+      </p:sp>
+      <p:sp>
+        <p:nvSpPr>
+          <p:cNvPr id="3" name="Notes Placeholder 2"/>
+          <p:cNvSpPr>
+            <a:spLocks noGrp="1"/>
+          </p:cNvSpPr>
+          <p:nvPr>
+            <p:ph type="body" idx="3" sz="quarter"/>
+          </p:nvPr>
+        </p:nvSpPr>
+        <p:spPr/>
+        <p:txBody>
+          <a:bodyPr/>
+          <a:lstStyle/>
+          <a:p>
+            <a:r>
+              <a:t>Hands-on: module1/examples/examples/spec_to_rtl/</a:t>
+            </a:r>
+          </a:p>
+        </p:txBody>
+      </p:sp>
+      <p:sp>
+        <p:nvSpPr>
+          <p:cNvPr id="4" name="Slide Number Placeholder 3"/>
+          <p:cNvSpPr>
+            <a:spLocks noGrp="1"/>
+          </p:cNvSpPr>
+          <p:nvPr>
+            <p:ph type="sldNum" idx="5" sz="quarter"/>
+          </p:nvPr>
+        </p:nvSpPr>
+        <p:spPr/>
+      </p:sp>
+    </p:spTree>
+  </p:cSld>
+  <p:clrMapOvr>
+    <a:masterClrMapping/>
+  </p:clrMapOvr>
+</p:notes>
+</file>
+
+<file path=ppt/notesSlides/notesSlide17.xml><?xml version="1.0" encoding="utf-8"?>
+<p:notes xmlns:a="http://schemas.openxmlformats.org/drawingml/2006/main" xmlns:p="http://schemas.openxmlformats.org/presentationml/2006/main" xmlns:r="http://schemas.openxmlformats.org/officeDocument/2006/relationships">
+  <p:cSld>
+    <p:spTree>
+      <p:nvGrpSpPr>
+        <p:cNvPr id="1" name=""/>
+        <p:cNvGrpSpPr/>
+        <p:nvPr/>
+      </p:nvGrpSpPr>
+      <p:grpSpPr>
+        <a:xfrm>
+          <a:off x="0" y="0"/>
+          <a:ext cx="0" cy="0"/>
+          <a:chOff x="0" y="0"/>
+          <a:chExt cx="0" cy="0"/>
+        </a:xfrm>
+      </p:grpSpPr>
+      <p:sp>
+        <p:nvSpPr>
+          <p:cNvPr id="2" name="Slide Image Placeholder 1"/>
+          <p:cNvSpPr>
+            <a:spLocks noGrp="1"/>
+          </p:cNvSpPr>
+          <p:nvPr>
+            <p:ph type="sldImg" idx="2"/>
+          </p:nvPr>
+        </p:nvSpPr>
+        <p:spPr/>
+      </p:sp>
+      <p:sp>
+        <p:nvSpPr>
+          <p:cNvPr id="3" name="Notes Placeholder 2"/>
+          <p:cNvSpPr>
+            <a:spLocks noGrp="1"/>
+          </p:cNvSpPr>
+          <p:nvPr>
+            <p:ph type="body" idx="3" sz="quarter"/>
+          </p:nvPr>
+        </p:nvSpPr>
+        <p:spPr/>
+        <p:txBody>
+          <a:bodyPr/>
+          <a:lstStyle/>
+          <a:p>
+            <a:r>
+              <a:t>From MODULE1 Learning Outcomes.</a:t>
             </a:r>
           </a:p>
         </p:txBody>
@@ -592,7 +1167,7 @@
           <a:lstStyle/>
           <a:p>
             <a:r>
-              <a:t>From MODULE1 Topics Covered.</a:t>
+              <a:t>From MODULE1 Design Architecture.</a:t>
             </a:r>
           </a:p>
         </p:txBody>
@@ -662,7 +1237,7 @@
           <a:lstStyle/>
           <a:p>
             <a:r>
-              <a:t>From MODULE1 Topics Covered.</a:t>
+              <a:t>From MODULE1 Design Architecture.</a:t>
             </a:r>
           </a:p>
         </p:txBody>
@@ -732,7 +1307,7 @@
           <a:lstStyle/>
           <a:p>
             <a:r>
-              <a:t>Full detail in docs/MODULE1.md command reference.</a:t>
+              <a:t>From MODULE1 Design Architecture.</a:t>
             </a:r>
           </a:p>
         </p:txBody>
@@ -802,7 +1377,7 @@
           <a:lstStyle/>
           <a:p>
             <a:r>
-              <a:t>Full detail in docs/MODULE1.md command reference.</a:t>
+              <a:t>From MODULE1 Verification &amp; Testing Methods.</a:t>
             </a:r>
           </a:p>
         </p:txBody>
@@ -872,7 +1447,7 @@
           <a:lstStyle/>
           <a:p>
             <a:r>
-              <a:t>Full detail in docs/MODULE1.md command reference.</a:t>
+              <a:t>From MODULE1 Verification &amp; Testing Methods.</a:t>
             </a:r>
           </a:p>
         </p:txBody>
@@ -942,7 +1517,7 @@
           <a:lstStyle/>
           <a:p>
             <a:r>
-              <a:t>Run from course repository root.</a:t>
+              <a:t>From MODULE1 Verification &amp; Testing Methods.</a:t>
             </a:r>
           </a:p>
         </p:txBody>
@@ -1012,7 +1587,7 @@
           <a:lstStyle/>
           <a:p>
             <a:r>
-              <a:t>module1/examples/spec_to_rtl/README.md</a:t>
+              <a:t>From MODULE1 Topics Covered.</a:t>
             </a:r>
           </a:p>
         </p:txBody>
@@ -1082,7 +1657,7 @@
           <a:lstStyle/>
           <a:p>
             <a:r>
-              <a:t>Hands-on: module1/examples/spec_to_rtl/</a:t>
+              <a:t>From MODULE1 Topics Covered.</a:t>
             </a:r>
           </a:p>
         </p:txBody>
@@ -4214,8 +4789,8 @@
         </p:nvSpPr>
         <p:spPr>
           <a:xfrm>
-            <a:off x="548640" y="2743200"/>
-            <a:ext cx="11064240" cy="1371600"/>
+            <a:off x="548640" y="411480"/>
+            <a:ext cx="11064240" cy="777240"/>
           </a:xfrm>
           <a:prstGeom prst="rect">
             <a:avLst/>
@@ -4228,11 +4803,11 @@
           </a:bodyPr>
           <a:lstStyle/>
           <a:p>
-            <a:pPr algn="ctr">
-              <a:lnSpc>
-                <a:spcPts val="2200"/>
-              </a:lnSpc>
-              <a:defRPr sz="3600" b="1">
+            <a:pPr>
+              <a:lnSpc>
+                <a:spcPts val="2200"/>
+              </a:lnSpc>
+              <a:defRPr sz="2800" b="1">
                 <a:solidFill>
                   <a:srgbClr val="1A1A2E"/>
                 </a:solidFill>
@@ -4240,14 +4815,77 @@
               </a:defRPr>
             </a:pPr>
             <a:r>
-              <a:t>Command reference highlights</a:t>
-            </a:r>
-          </a:p>
-        </p:txBody>
-      </p:sp>
-      <p:sp>
-        <p:nvSpPr>
-          <p:cNvPr id="3" name="TextBox 2"/>
+              <a:t>Verification environment architecture</a:t>
+            </a:r>
+          </a:p>
+        </p:txBody>
+      </p:sp>
+      <p:pic>
+        <p:nvPicPr>
+          <p:cNvPr id="3" name="Picture 2" descr="verification_architecture.png"/>
+          <p:cNvPicPr>
+            <a:picLocks noChangeAspect="1"/>
+          </p:cNvPicPr>
+          <p:nvPr/>
+        </p:nvPicPr>
+        <p:blipFill>
+          <a:blip r:embed="rId2"/>
+          <a:stretch>
+            <a:fillRect/>
+          </a:stretch>
+        </p:blipFill>
+        <p:spPr>
+          <a:xfrm>
+            <a:off x="548640" y="1143000"/>
+            <a:ext cx="8128000" cy="4572000"/>
+          </a:xfrm>
+          <a:prstGeom prst="rect">
+            <a:avLst/>
+          </a:prstGeom>
+        </p:spPr>
+      </p:pic>
+      <p:sp>
+        <p:nvSpPr>
+          <p:cNvPr id="4" name="TextBox 3"/>
+          <p:cNvSpPr txBox="1"/>
+          <p:nvPr/>
+        </p:nvSpPr>
+        <p:spPr>
+          <a:xfrm>
+            <a:off x="548640" y="5897880"/>
+            <a:ext cx="11064240" cy="411480"/>
+          </a:xfrm>
+          <a:prstGeom prst="rect">
+            <a:avLst/>
+          </a:prstGeom>
+          <a:noFill/>
+        </p:spPr>
+        <p:txBody>
+          <a:bodyPr wrap="square">
+            <a:noAutofit/>
+          </a:bodyPr>
+          <a:lstStyle/>
+          <a:p>
+            <a:pPr>
+              <a:lnSpc>
+                <a:spcPts val="2200"/>
+              </a:lnSpc>
+              <a:defRPr sz="1200" b="0">
+                <a:solidFill>
+                  <a:srgbClr val="333333"/>
+                </a:solidFill>
+                <a:latin typeface="Calibri"/>
+              </a:defRPr>
+            </a:pPr>
+            <a:r>
+              <a:t>Module 1: UVM layers, agents, and checkers for this phase.</a:t>
+            </a:r>
+          </a:p>
+        </p:txBody>
+      </p:sp>
+      <p:sp>
+        <p:nvSpPr>
+          <p:cNvPr id="5" name="TextBox 4"/>
           <p:cNvSpPr txBox="1"/>
           <p:nvPr/>
         </p:nvSpPr>
@@ -4336,7 +4974,7 @@
               </a:defRPr>
             </a:pPr>
             <a:r>
-              <a:t>Environment checks</a:t>
+              <a:t>1. Artifact flow (spec_to_rtl)</a:t>
             </a:r>
           </a:p>
         </p:txBody>
@@ -4378,7 +5016,140 @@
               </a:defRPr>
             </a:pPr>
             <a:r>
-              <a:t>• verilator --version</a:t>
+              <a:t>• SPEC.md → requirements in plain language (interface,</a:t>
+            </a:r>
+          </a:p>
+          <a:p>
+            <a:pPr>
+              <a:lnSpc>
+                <a:spcPts val="2200"/>
+              </a:lnSpc>
+              <a:spcAft>
+                <a:spcPts val="1000"/>
+              </a:spcAft>
+              <a:defRPr sz="2000" b="0">
+                <a:solidFill>
+                  <a:srgbClr val="333333"/>
+                </a:solidFill>
+                <a:latin typeface="Calibri"/>
+              </a:defRPr>
+            </a:pPr>
+            <a:r>
+              <a:t>      behavior, timing).</a:t>
+            </a:r>
+          </a:p>
+          <a:p>
+            <a:pPr>
+              <a:lnSpc>
+                <a:spcPts val="2200"/>
+              </a:lnSpc>
+              <a:spcAft>
+                <a:spcPts val="1000"/>
+              </a:spcAft>
+              <a:defRPr sz="2000" b="0">
+                <a:solidFill>
+                  <a:srgbClr val="333333"/>
+                </a:solidFill>
+                <a:latin typeface="Calibri"/>
+              </a:defRPr>
+            </a:pPr>
+            <a:r>
+              <a:t>• dut/counter.v → synthesizable RTL implementing the</a:t>
+            </a:r>
+          </a:p>
+          <a:p>
+            <a:pPr>
+              <a:lnSpc>
+                <a:spcPts val="2200"/>
+              </a:lnSpc>
+              <a:spcAft>
+                <a:spcPts val="1000"/>
+              </a:spcAft>
+              <a:defRPr sz="2000" b="0">
+                <a:solidFill>
+                  <a:srgbClr val="333333"/>
+                </a:solidFill>
+                <a:latin typeface="Calibri"/>
+              </a:defRPr>
+            </a:pPr>
+            <a:r>
+              <a:t>      spec.</a:t>
+            </a:r>
+          </a:p>
+          <a:p>
+            <a:pPr>
+              <a:lnSpc>
+                <a:spcPts val="2200"/>
+              </a:lnSpc>
+              <a:spcAft>
+                <a:spcPts val="1000"/>
+              </a:spcAft>
+              <a:defRPr sz="2000" b="0">
+                <a:solidFill>
+                  <a:srgbClr val="333333"/>
+                </a:solidFill>
+                <a:latin typeface="Calibri"/>
+              </a:defRPr>
+            </a:pPr>
+            <a:r>
+              <a:t>• top.v → wrapper connecting DUT pins to the</a:t>
+            </a:r>
+          </a:p>
+          <a:p>
+            <a:pPr>
+              <a:lnSpc>
+                <a:spcPts val="2200"/>
+              </a:lnSpc>
+              <a:spcAft>
+                <a:spcPts val="1000"/>
+              </a:spcAft>
+              <a:defRPr sz="2000" b="0">
+                <a:solidFill>
+                  <a:srgbClr val="333333"/>
+                </a:solidFill>
+                <a:latin typeface="Calibri"/>
+              </a:defRPr>
+            </a:pPr>
+            <a:r>
+              <a:t>      simulation harness.</a:t>
+            </a:r>
+          </a:p>
+          <a:p>
+            <a:pPr>
+              <a:lnSpc>
+                <a:spcPts val="2200"/>
+              </a:lnSpc>
+              <a:spcAft>
+                <a:spcPts val="1000"/>
+              </a:spcAft>
+              <a:defRPr sz="2000" b="0">
+                <a:solidFill>
+                  <a:srgbClr val="333333"/>
+                </a:solidFill>
+                <a:latin typeface="Calibri"/>
+              </a:defRPr>
+            </a:pPr>
+            <a:r>
+              <a:t>• sim_main.cpp → clock, reset, stimulus, and result</a:t>
+            </a:r>
+          </a:p>
+          <a:p>
+            <a:pPr>
+              <a:lnSpc>
+                <a:spcPts val="2200"/>
+              </a:lnSpc>
+              <a:spcAft>
+                <a:spcPts val="1000"/>
+              </a:spcAft>
+              <a:defRPr sz="2000" b="0">
+                <a:solidFill>
+                  <a:srgbClr val="333333"/>
+                </a:solidFill>
+                <a:latin typeface="Calibri"/>
+              </a:defRPr>
+            </a:pPr>
+            <a:r>
+              <a:t>      checking outside RTL.</a:t>
             </a:r>
           </a:p>
         </p:txBody>
@@ -4474,7 +5245,7 @@
               </a:defRPr>
             </a:pPr>
             <a:r>
-              <a:t>Build and run spec_to_rtl</a:t>
+              <a:t>2. Counter DUT structure</a:t>
             </a:r>
           </a:p>
         </p:txBody>
@@ -4516,7 +5287,102 @@
               </a:defRPr>
             </a:pPr>
             <a:r>
-              <a:t>• cd module1/examples/spec_to_rtl</a:t>
+              <a:t>• 8-bit up-counter: increments when `enable` is high;</a:t>
+            </a:r>
+          </a:p>
+          <a:p>
+            <a:pPr>
+              <a:lnSpc>
+                <a:spcPts val="2200"/>
+              </a:lnSpc>
+              <a:spcAft>
+                <a:spcPts val="1000"/>
+              </a:spcAft>
+              <a:defRPr sz="2000" b="0">
+                <a:solidFill>
+                  <a:srgbClr val="333333"/>
+                </a:solidFill>
+                <a:latin typeface="Calibri"/>
+              </a:defRPr>
+            </a:pPr>
+            <a:r>
+              <a:t>      holds when disabled.</a:t>
+            </a:r>
+          </a:p>
+          <a:p>
+            <a:pPr>
+              <a:lnSpc>
+                <a:spcPts val="2200"/>
+              </a:lnSpc>
+              <a:spcAft>
+                <a:spcPts val="1000"/>
+              </a:spcAft>
+              <a:defRPr sz="2000" b="0">
+                <a:solidFill>
+                  <a:srgbClr val="333333"/>
+                </a:solidFill>
+                <a:latin typeface="Calibri"/>
+              </a:defRPr>
+            </a:pPr>
+            <a:r>
+              <a:t>• Reset: synchronous active-low `rst_n` clears `count`</a:t>
+            </a:r>
+          </a:p>
+          <a:p>
+            <a:pPr>
+              <a:lnSpc>
+                <a:spcPts val="2200"/>
+              </a:lnSpc>
+              <a:spcAft>
+                <a:spcPts val="1000"/>
+              </a:spcAft>
+              <a:defRPr sz="2000" b="0">
+                <a:solidFill>
+                  <a:srgbClr val="333333"/>
+                </a:solidFill>
+                <a:latin typeface="Calibri"/>
+              </a:defRPr>
+            </a:pPr>
+            <a:r>
+              <a:t>      to zero.</a:t>
+            </a:r>
+          </a:p>
+          <a:p>
+            <a:pPr>
+              <a:lnSpc>
+                <a:spcPts val="2200"/>
+              </a:lnSpc>
+              <a:spcAft>
+                <a:spcPts val="1000"/>
+              </a:spcAft>
+              <a:defRPr sz="2000" b="0">
+                <a:solidFill>
+                  <a:srgbClr val="333333"/>
+                </a:solidFill>
+                <a:latin typeface="Calibri"/>
+              </a:defRPr>
+            </a:pPr>
+            <a:r>
+              <a:t>• Ports: `clk`, `rst_n`, `enable`, `count[7:0]` — map</a:t>
+            </a:r>
+          </a:p>
+          <a:p>
+            <a:pPr>
+              <a:lnSpc>
+                <a:spcPts val="2200"/>
+              </a:lnSpc>
+              <a:spcAft>
+                <a:spcPts val="1000"/>
+              </a:spcAft>
+              <a:defRPr sz="2000" b="0">
+                <a:solidFill>
+                  <a:srgbClr val="333333"/>
+                </a:solidFill>
+                <a:latin typeface="Calibri"/>
+              </a:defRPr>
+            </a:pPr>
+            <a:r>
+              <a:t>      directly from the spec interface table.</a:t>
             </a:r>
           </a:p>
         </p:txBody>
@@ -4612,7 +5478,7 @@
               </a:defRPr>
             </a:pPr>
             <a:r>
-              <a:t>Module script (from repo root)</a:t>
+              <a:t>3. Simulation harness attachment</a:t>
             </a:r>
           </a:p>
         </p:txBody>
@@ -4654,7 +5520,64 @@
               </a:defRPr>
             </a:pPr>
             <a:r>
-              <a:t>• ./scripts/module1.sh --check # Environment only</a:t>
+              <a:t>• C++ generates `clk` and drives `rst_n` / `enable`;</a:t>
+            </a:r>
+          </a:p>
+          <a:p>
+            <a:pPr>
+              <a:lnSpc>
+                <a:spcPts val="2200"/>
+              </a:lnSpc>
+              <a:spcAft>
+                <a:spcPts val="1000"/>
+              </a:spcAft>
+              <a:defRPr sz="2000" b="0">
+                <a:solidFill>
+                  <a:srgbClr val="333333"/>
+                </a:solidFill>
+                <a:latin typeface="Calibri"/>
+              </a:defRPr>
+            </a:pPr>
+            <a:r>
+              <a:t>      reads `count` each cycle.</a:t>
+            </a:r>
+          </a:p>
+          <a:p>
+            <a:pPr>
+              <a:lnSpc>
+                <a:spcPts val="2200"/>
+              </a:lnSpc>
+              <a:spcAft>
+                <a:spcPts val="1000"/>
+              </a:spcAft>
+              <a:defRPr sz="2000" b="0">
+                <a:solidFill>
+                  <a:srgbClr val="333333"/>
+                </a:solidFill>
+                <a:latin typeface="Calibri"/>
+              </a:defRPr>
+            </a:pPr>
+            <a:r>
+              <a:t>• No SystemVerilog testbench yet — you will add</a:t>
+            </a:r>
+          </a:p>
+          <a:p>
+            <a:pPr>
+              <a:lnSpc>
+                <a:spcPts val="2200"/>
+              </a:lnSpc>
+              <a:spcAft>
+                <a:spcPts val="1000"/>
+              </a:spcAft>
+              <a:defRPr sz="2000" b="0">
+                <a:solidFill>
+                  <a:srgbClr val="333333"/>
+                </a:solidFill>
+                <a:latin typeface="Calibri"/>
+              </a:defRPr>
+            </a:pPr>
+            <a:r>
+              <a:t>      structured TB/UVM in Module 2.</a:t>
             </a:r>
           </a:p>
         </p:txBody>
@@ -4750,7 +5673,7 @@
               </a:defRPr>
             </a:pPr>
             <a:r>
-              <a:t>Hands-on examples</a:t>
+              <a:t>Verification &amp; testing methods</a:t>
             </a:r>
           </a:p>
         </p:txBody>
@@ -4846,58 +5769,14 @@
               </a:defRPr>
             </a:pPr>
             <a:r>
-              <a:t>Module 1 self-check</a:t>
-            </a:r>
-          </a:p>
-        </p:txBody>
-      </p:sp>
-      <p:sp>
-        <p:nvSpPr>
-          <p:cNvPr id="3" name="TextBox 2"/>
-          <p:cNvSpPr txBox="1"/>
-          <p:nvPr/>
-        </p:nvSpPr>
-        <p:spPr>
-          <a:xfrm>
-            <a:off x="548640" y="1051560"/>
-            <a:ext cx="11064240" cy="914400"/>
-          </a:xfrm>
-          <a:prstGeom prst="rect">
-            <a:avLst/>
-          </a:prstGeom>
-          <a:solidFill>
-            <a:srgbClr val="F4F4F4"/>
-          </a:solidFill>
-        </p:spPr>
-        <p:txBody>
-          <a:bodyPr wrap="square">
-            <a:noAutofit/>
-          </a:bodyPr>
-          <a:lstStyle/>
-          <a:p>
-            <a:pPr>
-              <a:lnSpc>
-                <a:spcPts val="2200"/>
-              </a:lnSpc>
-              <a:spcAft>
-                <a:spcPts val="200"/>
-              </a:spcAft>
-              <a:defRPr sz="2000" b="0">
-                <a:solidFill>
-                  <a:srgbClr val="333333"/>
-                </a:solidFill>
-                <a:latin typeface="Consolas"/>
-              </a:defRPr>
-            </a:pPr>
-            <a:r>
-              <a:t>$ ./scripts/module1.sh --check</a:t>
+              <a:t>Testing and closure flow</a:t>
             </a:r>
           </a:p>
         </p:txBody>
       </p:sp>
       <p:pic>
         <p:nvPicPr>
-          <p:cNvPr id="4" name="Picture 3" descr="module1_check.png"/>
+          <p:cNvPr id="3" name="Picture 2" descr="testing_methods.png"/>
           <p:cNvPicPr>
             <a:picLocks noChangeAspect="1"/>
           </p:cNvPicPr>
@@ -4911,14 +5790,53 @@
         </p:blipFill>
         <p:spPr>
           <a:xfrm>
-            <a:off x="548640" y="1965960"/>
-            <a:ext cx="7071358" cy="3977639"/>
+            <a:off x="548640" y="1143000"/>
+            <a:ext cx="8128000" cy="4572000"/>
           </a:xfrm>
           <a:prstGeom prst="rect">
             <a:avLst/>
           </a:prstGeom>
         </p:spPr>
       </p:pic>
+      <p:sp>
+        <p:nvSpPr>
+          <p:cNvPr id="4" name="TextBox 3"/>
+          <p:cNvSpPr txBox="1"/>
+          <p:nvPr/>
+        </p:nvSpPr>
+        <p:spPr>
+          <a:xfrm>
+            <a:off x="548640" y="5897880"/>
+            <a:ext cx="11064240" cy="411480"/>
+          </a:xfrm>
+          <a:prstGeom prst="rect">
+            <a:avLst/>
+          </a:prstGeom>
+          <a:noFill/>
+        </p:spPr>
+        <p:txBody>
+          <a:bodyPr wrap="square">
+            <a:noAutofit/>
+          </a:bodyPr>
+          <a:lstStyle/>
+          <a:p>
+            <a:pPr>
+              <a:lnSpc>
+                <a:spcPts val="2200"/>
+              </a:lnSpc>
+              <a:defRPr sz="1200" b="0">
+                <a:solidFill>
+                  <a:srgbClr val="333333"/>
+                </a:solidFill>
+                <a:latin typeface="Calibri"/>
+              </a:defRPr>
+            </a:pPr>
+            <a:r>
+              <a:t>Module 1: how tests, checks, and metrics close verification goals.</a:t>
+            </a:r>
+          </a:p>
+        </p:txBody>
+      </p:sp>
       <p:sp>
         <p:nvSpPr>
           <p:cNvPr id="5" name="TextBox 4"/>
@@ -5010,7 +5928,7 @@
               </a:defRPr>
             </a:pPr>
             <a:r>
-              <a:t>Example 1: Spec-to-RTL example</a:t>
+              <a:t>1. What we verify in Module 1</a:t>
             </a:r>
           </a:p>
         </p:txBody>
@@ -5052,7 +5970,7 @@
               </a:defRPr>
             </a:pPr>
             <a:r>
-              <a:t>• [examples/spec_to_rtl/WALKTHROUGH.md](examples/spec_</a:t>
+              <a:t>• RTL behavior matches SPEC.md (reset, enable gating,</a:t>
             </a:r>
           </a:p>
           <a:p>
@@ -5071,7 +5989,45 @@
               </a:defRPr>
             </a:pPr>
             <a:r>
-              <a:t>      to_rtl/WALKTHROUGH.md) — Section-by-section rea…</a:t>
+              <a:t>      count progression).</a:t>
+            </a:r>
+          </a:p>
+          <a:p>
+            <a:pPr>
+              <a:lnSpc>
+                <a:spcPts val="2200"/>
+              </a:lnSpc>
+              <a:spcAft>
+                <a:spcPts val="1000"/>
+              </a:spcAft>
+              <a:defRPr sz="2000" b="0">
+                <a:solidFill>
+                  <a:srgbClr val="333333"/>
+                </a:solidFill>
+                <a:latin typeface="Calibri"/>
+              </a:defRPr>
+            </a:pPr>
+            <a:r>
+              <a:t>• Directed scenario: release reset, enable for N</a:t>
+            </a:r>
+          </a:p>
+          <a:p>
+            <a:pPr>
+              <a:lnSpc>
+                <a:spcPts val="2200"/>
+              </a:lnSpc>
+              <a:spcAft>
+                <a:spcPts val="1000"/>
+              </a:spcAft>
+              <a:defRPr sz="2000" b="0">
+                <a:solidFill>
+                  <a:srgbClr val="333333"/>
+                </a:solidFill>
+                <a:latin typeface="Calibri"/>
+              </a:defRPr>
+            </a:pPr>
+            <a:r>
+              <a:t>      cycles, expect `count == N`.</a:t>
             </a:r>
           </a:p>
         </p:txBody>
@@ -5167,7 +6123,7 @@
               </a:defRPr>
             </a:pPr>
             <a:r>
-              <a:t>Demo: Spec-to-RTL example</a:t>
+              <a:t>2. Stimulus and checking</a:t>
             </a:r>
           </a:p>
         </p:txBody>
@@ -5180,15 +6136,13 @@
         </p:nvSpPr>
         <p:spPr>
           <a:xfrm>
-            <a:off x="548640" y="1051560"/>
-            <a:ext cx="11064240" cy="914400"/>
-          </a:xfrm>
-          <a:prstGeom prst="rect">
-            <a:avLst/>
-          </a:prstGeom>
-          <a:solidFill>
-            <a:srgbClr val="F4F4F4"/>
-          </a:solidFill>
+            <a:off x="548640" y="1234440"/>
+            <a:ext cx="11064240" cy="4937760"/>
+          </a:xfrm>
+          <a:prstGeom prst="rect">
+            <a:avLst/>
+          </a:prstGeom>
+          <a:noFill/>
         </p:spPr>
         <p:txBody>
           <a:bodyPr wrap="square">
@@ -5201,48 +6155,119 @@
                 <a:spcPts val="2200"/>
               </a:lnSpc>
               <a:spcAft>
-                <a:spcPts val="200"/>
+                <a:spcPts val="1000"/>
               </a:spcAft>
               <a:defRPr sz="2000" b="0">
                 <a:solidFill>
                   <a:srgbClr val="333333"/>
                 </a:solidFill>
-                <a:latin typeface="Consolas"/>
-              </a:defRPr>
-            </a:pPr>
-            <a:r>
-              <a:t>$ cd module1/examples/spec_to_rtl &amp;&amp; make run</a:t>
-            </a:r>
-          </a:p>
-        </p:txBody>
-      </p:sp>
-      <p:pic>
-        <p:nvPicPr>
-          <p:cNvPr id="4" name="Picture 3" descr="ex01_spec_to_rtl.png"/>
-          <p:cNvPicPr>
-            <a:picLocks noChangeAspect="1"/>
-          </p:cNvPicPr>
-          <p:nvPr/>
-        </p:nvPicPr>
-        <p:blipFill>
-          <a:blip r:embed="rId2"/>
-          <a:stretch>
-            <a:fillRect/>
-          </a:stretch>
-        </p:blipFill>
-        <p:spPr>
-          <a:xfrm>
-            <a:off x="548640" y="1965960"/>
-            <a:ext cx="7071358" cy="3977639"/>
-          </a:xfrm>
-          <a:prstGeom prst="rect">
-            <a:avLst/>
-          </a:prstGeom>
-        </p:spPr>
-      </p:pic>
-      <p:sp>
-        <p:nvSpPr>
-          <p:cNvPr id="5" name="TextBox 4"/>
+                <a:latin typeface="Calibri"/>
+              </a:defRPr>
+            </a:pPr>
+            <a:r>
+              <a:t>• Stimulus: C++ toggles `enable` for a known number of</a:t>
+            </a:r>
+          </a:p>
+          <a:p>
+            <a:pPr>
+              <a:lnSpc>
+                <a:spcPts val="2200"/>
+              </a:lnSpc>
+              <a:spcAft>
+                <a:spcPts val="1000"/>
+              </a:spcAft>
+              <a:defRPr sz="2000" b="0">
+                <a:solidFill>
+                  <a:srgbClr val="333333"/>
+                </a:solidFill>
+                <a:latin typeface="Calibri"/>
+              </a:defRPr>
+            </a:pPr>
+            <a:r>
+              <a:t>      clock cycles.</a:t>
+            </a:r>
+          </a:p>
+          <a:p>
+            <a:pPr>
+              <a:lnSpc>
+                <a:spcPts val="2200"/>
+              </a:lnSpc>
+              <a:spcAft>
+                <a:spcPts val="1000"/>
+              </a:spcAft>
+              <a:defRPr sz="2000" b="0">
+                <a:solidFill>
+                  <a:srgbClr val="333333"/>
+                </a:solidFill>
+                <a:latin typeface="Calibri"/>
+              </a:defRPr>
+            </a:pPr>
+            <a:r>
+              <a:t>• Check: compare `count` to expected value; print</a:t>
+            </a:r>
+          </a:p>
+          <a:p>
+            <a:pPr>
+              <a:lnSpc>
+                <a:spcPts val="2200"/>
+              </a:lnSpc>
+              <a:spcAft>
+                <a:spcPts val="1000"/>
+              </a:spcAft>
+              <a:defRPr sz="2000" b="0">
+                <a:solidFill>
+                  <a:srgbClr val="333333"/>
+                </a:solidFill>
+                <a:latin typeface="Calibri"/>
+              </a:defRPr>
+            </a:pPr>
+            <a:r>
+              <a:t>      PASS/FAIL.</a:t>
+            </a:r>
+          </a:p>
+          <a:p>
+            <a:pPr>
+              <a:lnSpc>
+                <a:spcPts val="2200"/>
+              </a:lnSpc>
+              <a:spcAft>
+                <a:spcPts val="1000"/>
+              </a:spcAft>
+              <a:defRPr sz="2000" b="0">
+                <a:solidFill>
+                  <a:srgbClr val="333333"/>
+                </a:solidFill>
+                <a:latin typeface="Calibri"/>
+              </a:defRPr>
+            </a:pPr>
+            <a:r>
+              <a:t>• Traceability: each check should cite the spec</a:t>
+            </a:r>
+          </a:p>
+          <a:p>
+            <a:pPr>
+              <a:lnSpc>
+                <a:spcPts val="2200"/>
+              </a:lnSpc>
+              <a:spcAft>
+                <a:spcPts val="1000"/>
+              </a:spcAft>
+              <a:defRPr sz="2000" b="0">
+                <a:solidFill>
+                  <a:srgbClr val="333333"/>
+                </a:solidFill>
+                <a:latin typeface="Calibri"/>
+              </a:defRPr>
+            </a:pPr>
+            <a:r>
+              <a:t>      sentence it proves.</a:t>
+            </a:r>
+          </a:p>
+        </p:txBody>
+      </p:sp>
+      <p:sp>
+        <p:nvSpPr>
+          <p:cNvPr id="4" name="TextBox 3"/>
           <p:cNvSpPr txBox="1"/>
           <p:nvPr/>
         </p:nvSpPr>
@@ -5305,8 +6330,8 @@
         </p:nvSpPr>
         <p:spPr>
           <a:xfrm>
-            <a:off x="548640" y="2743200"/>
-            <a:ext cx="11064240" cy="1371600"/>
+            <a:off x="548640" y="411480"/>
+            <a:ext cx="11064240" cy="777240"/>
           </a:xfrm>
           <a:prstGeom prst="rect">
             <a:avLst/>
@@ -5319,11 +6344,11 @@
           </a:bodyPr>
           <a:lstStyle/>
           <a:p>
-            <a:pPr algn="ctr">
-              <a:lnSpc>
-                <a:spcPts val="2200"/>
-              </a:lnSpc>
-              <a:defRPr sz="3600" b="1">
+            <a:pPr>
+              <a:lnSpc>
+                <a:spcPts val="2200"/>
+              </a:lnSpc>
+              <a:defRPr sz="2800" b="1">
                 <a:solidFill>
                   <a:srgbClr val="1A1A2E"/>
                 </a:solidFill>
@@ -5331,7 +6356,7 @@
               </a:defRPr>
             </a:pPr>
             <a:r>
-              <a:t>Practice &amp; assessment</a:t>
+              <a:t>3. What is not covered yet</a:t>
             </a:r>
           </a:p>
         </p:txBody>
@@ -5339,6 +6364,105 @@
       <p:sp>
         <p:nvSpPr>
           <p:cNvPr id="3" name="TextBox 2"/>
+          <p:cNvSpPr txBox="1"/>
+          <p:nvPr/>
+        </p:nvSpPr>
+        <p:spPr>
+          <a:xfrm>
+            <a:off x="548640" y="1234440"/>
+            <a:ext cx="11064240" cy="4937760"/>
+          </a:xfrm>
+          <a:prstGeom prst="rect">
+            <a:avLst/>
+          </a:prstGeom>
+          <a:noFill/>
+        </p:spPr>
+        <p:txBody>
+          <a:bodyPr wrap="square">
+            <a:noAutofit/>
+          </a:bodyPr>
+          <a:lstStyle/>
+          <a:p>
+            <a:pPr>
+              <a:lnSpc>
+                <a:spcPts val="2200"/>
+              </a:lnSpc>
+              <a:spcAft>
+                <a:spcPts val="1000"/>
+              </a:spcAft>
+              <a:defRPr sz="2000" b="0">
+                <a:solidFill>
+                  <a:srgbClr val="333333"/>
+                </a:solidFill>
+                <a:latin typeface="Calibri"/>
+              </a:defRPr>
+            </a:pPr>
+            <a:r>
+              <a:t>• Random stimulus, functional coverage, scoreboards —</a:t>
+            </a:r>
+          </a:p>
+          <a:p>
+            <a:pPr>
+              <a:lnSpc>
+                <a:spcPts val="2200"/>
+              </a:lnSpc>
+              <a:spcAft>
+                <a:spcPts val="1000"/>
+              </a:spcAft>
+              <a:defRPr sz="2000" b="0">
+                <a:solidFill>
+                  <a:srgbClr val="333333"/>
+                </a:solidFill>
+                <a:latin typeface="Calibri"/>
+              </a:defRPr>
+            </a:pPr>
+            <a:r>
+              <a:t>      Module 2 (UVM) and protocol modules.</a:t>
+            </a:r>
+          </a:p>
+          <a:p>
+            <a:pPr>
+              <a:lnSpc>
+                <a:spcPts val="2200"/>
+              </a:lnSpc>
+              <a:spcAft>
+                <a:spcPts val="1000"/>
+              </a:spcAft>
+              <a:defRPr sz="2000" b="0">
+                <a:solidFill>
+                  <a:srgbClr val="333333"/>
+                </a:solidFill>
+                <a:latin typeface="Calibri"/>
+              </a:defRPr>
+            </a:pPr>
+            <a:r>
+              <a:t>• Use [UNDERSTANDING_THE_SPEC.md](../module1/UNDERSTAN</a:t>
+            </a:r>
+          </a:p>
+          <a:p>
+            <a:pPr>
+              <a:lnSpc>
+                <a:spcPts val="2200"/>
+              </a:lnSpc>
+              <a:spcAft>
+                <a:spcPts val="1000"/>
+              </a:spcAft>
+              <a:defRPr sz="2000" b="0">
+                <a:solidFill>
+                  <a:srgbClr val="333333"/>
+                </a:solidFill>
+                <a:latin typeface="Calibri"/>
+              </a:defRPr>
+            </a:pPr>
+            <a:r>
+              <a:t>      DING_THE_SPEC.md) and [SPEC_TO_RTL_GUIDE.md](..…</a:t>
+            </a:r>
+          </a:p>
+        </p:txBody>
+      </p:sp>
+      <p:sp>
+        <p:nvSpPr>
+          <p:cNvPr id="4" name="TextBox 3"/>
           <p:cNvSpPr txBox="1"/>
           <p:nvPr/>
         </p:nvSpPr>
@@ -5401,8 +6525,8 @@
         </p:nvSpPr>
         <p:spPr>
           <a:xfrm>
-            <a:off x="548640" y="411480"/>
-            <a:ext cx="11064240" cy="777240"/>
+            <a:off x="548640" y="2743200"/>
+            <a:ext cx="11064240" cy="1371600"/>
           </a:xfrm>
           <a:prstGeom prst="rect">
             <a:avLst/>
@@ -5415,11 +6539,11 @@
           </a:bodyPr>
           <a:lstStyle/>
           <a:p>
-            <a:pPr>
-              <a:lnSpc>
-                <a:spcPts val="2200"/>
-              </a:lnSpc>
-              <a:defRPr sz="2800" b="1">
+            <a:pPr algn="ctr">
+              <a:lnSpc>
+                <a:spcPts val="2200"/>
+              </a:lnSpc>
+              <a:defRPr sz="3600" b="1">
                 <a:solidFill>
                   <a:srgbClr val="1A1A2E"/>
                 </a:solidFill>
@@ -5427,7 +6551,7 @@
               </a:defRPr>
             </a:pPr>
             <a:r>
-              <a:t>Exercises</a:t>
+              <a:t>Syllabus topics</a:t>
             </a:r>
           </a:p>
         </p:txBody>
@@ -5435,86 +6559,6 @@
       <p:sp>
         <p:nvSpPr>
           <p:cNvPr id="3" name="TextBox 2"/>
-          <p:cNvSpPr txBox="1"/>
-          <p:nvPr/>
-        </p:nvSpPr>
-        <p:spPr>
-          <a:xfrm>
-            <a:off x="548640" y="1234440"/>
-            <a:ext cx="11064240" cy="4937760"/>
-          </a:xfrm>
-          <a:prstGeom prst="rect">
-            <a:avLst/>
-          </a:prstGeom>
-          <a:noFill/>
-        </p:spPr>
-        <p:txBody>
-          <a:bodyPr wrap="square">
-            <a:noAutofit/>
-          </a:bodyPr>
-          <a:lstStyle/>
-          <a:p>
-            <a:pPr>
-              <a:lnSpc>
-                <a:spcPts val="2200"/>
-              </a:lnSpc>
-              <a:spcAft>
-                <a:spcPts val="1000"/>
-              </a:spcAft>
-              <a:defRPr sz="2000" b="0">
-                <a:solidFill>
-                  <a:srgbClr val="333333"/>
-                </a:solidFill>
-                <a:latin typeface="Calibri"/>
-              </a:defRPr>
-            </a:pPr>
-            <a:r>
-              <a:t>• Read the spec and RTL</a:t>
-            </a:r>
-          </a:p>
-          <a:p>
-            <a:pPr>
-              <a:lnSpc>
-                <a:spcPts val="2200"/>
-              </a:lnSpc>
-              <a:spcAft>
-                <a:spcPts val="1000"/>
-              </a:spcAft>
-              <a:defRPr sz="2000" b="0">
-                <a:solidFill>
-                  <a:srgbClr val="333333"/>
-                </a:solidFill>
-                <a:latin typeface="Calibri"/>
-              </a:defRPr>
-            </a:pPr>
-            <a:r>
-              <a:t>• Run and extend the test</a:t>
-            </a:r>
-          </a:p>
-          <a:p>
-            <a:pPr>
-              <a:lnSpc>
-                <a:spcPts val="2200"/>
-              </a:lnSpc>
-              <a:spcAft>
-                <a:spcPts val="1000"/>
-              </a:spcAft>
-              <a:defRPr sz="2000" b="0">
-                <a:solidFill>
-                  <a:srgbClr val="333333"/>
-                </a:solidFill>
-                <a:latin typeface="Calibri"/>
-              </a:defRPr>
-            </a:pPr>
-            <a:r>
-              <a:t>• Optional: Trace</a:t>
-            </a:r>
-          </a:p>
-        </p:txBody>
-      </p:sp>
-      <p:sp>
-        <p:nvSpPr>
-          <p:cNvPr id="4" name="TextBox 3"/>
           <p:cNvSpPr txBox="1"/>
           <p:nvPr/>
         </p:nvSpPr>
@@ -5836,7 +6880,7 @@
               </a:defRPr>
             </a:pPr>
             <a:r>
-              <a:t>Assessment checklist</a:t>
+              <a:t>1. Specification → RTL Design Flow</a:t>
             </a:r>
           </a:p>
         </p:txBody>
@@ -5878,7 +6922,7 @@
               </a:defRPr>
             </a:pPr>
             <a:r>
-              <a:t>• Can explain the spec → RTL flow and the role of a</a:t>
+              <a:t>• Specification: Document interface (ports, widths,</a:t>
             </a:r>
           </a:p>
           <a:p>
@@ -5897,7 +6941,7 @@
               </a:defRPr>
             </a:pPr>
             <a:r>
-              <a:t>      written specification.</a:t>
+              <a:t>      direction), behavior (reset, enable, state transi…</a:t>
             </a:r>
           </a:p>
           <a:p>
@@ -5916,7 +6960,7 @@
               </a:defRPr>
             </a:pPr>
             <a:r>
-              <a:t>• Can explain what we verify (RTL vs spec) and why</a:t>
+              <a:t>• RTL: Implement the spec in Verilog/SystemVerilog;</a:t>
             </a:r>
           </a:p>
           <a:p>
@@ -5935,7 +6979,7 @@
               </a:defRPr>
             </a:pPr>
             <a:r>
-              <a:t>      verification is done.</a:t>
+              <a:t>      each requirement in the spec should map to clear…</a:t>
             </a:r>
           </a:p>
           <a:p>
@@ -5954,7 +6998,7 @@
               </a:defRPr>
             </a:pPr>
             <a:r>
-              <a:t>• Can run the spec_to_rtl example and describe what</a:t>
+              <a:t>• Traceability: Being able to point from a line in the</a:t>
             </a:r>
           </a:p>
           <a:p>
@@ -5973,45 +7017,7 @@
               </a:defRPr>
             </a:pPr>
             <a:r>
-              <a:t>      SPEC.md, counter.v, and sim_main.cpp do.</a:t>
-            </a:r>
-          </a:p>
-          <a:p>
-            <a:pPr>
-              <a:lnSpc>
-                <a:spcPts val="2200"/>
-              </a:lnSpc>
-              <a:spcAft>
-                <a:spcPts val="1000"/>
-              </a:spcAft>
-              <a:defRPr sz="2000" b="0">
-                <a:solidFill>
-                  <a:srgbClr val="333333"/>
-                </a:solidFill>
-                <a:latin typeface="Calibri"/>
-              </a:defRPr>
-            </a:pPr>
-            <a:r>
-              <a:t>• Ready to move to Module 2 (basic TB, UVM+SV,</a:t>
-            </a:r>
-          </a:p>
-          <a:p>
-            <a:pPr>
-              <a:lnSpc>
-                <a:spcPts val="2200"/>
-              </a:lnSpc>
-              <a:spcAft>
-                <a:spcPts val="1000"/>
-              </a:spcAft>
-              <a:defRPr sz="2000" b="0">
-                <a:solidFill>
-                  <a:srgbClr val="333333"/>
-                </a:solidFill>
-                <a:latin typeface="Calibri"/>
-              </a:defRPr>
-            </a:pPr>
-            <a:r>
-              <a:t>      toolchain).</a:t>
+              <a:t>      spec to the RTL that implements it (and vice v…</a:t>
             </a:r>
           </a:p>
         </p:txBody>
@@ -6107,7 +7113,7 @@
               </a:defRPr>
             </a:pPr>
             <a:r>
-              <a:t>Summary &amp; next steps</a:t>
+              <a:t>2. Design Methodology</a:t>
             </a:r>
           </a:p>
         </p:txBody>
@@ -6149,7 +7155,7 @@
               </a:defRPr>
             </a:pPr>
             <a:r>
-              <a:t>• Understand the specification → RTL design flow,</a:t>
+              <a:t>• Single block: One spec, one (or a few) RTL files,</a:t>
             </a:r>
           </a:p>
           <a:p>
@@ -6168,7 +7174,7 @@
               </a:defRPr>
             </a:pPr>
             <a:r>
-              <a:t>      design methodology, and why we verify.</a:t>
+              <a:t>      one testbench.</a:t>
             </a:r>
           </a:p>
           <a:p>
@@ -6187,7 +7193,7 @@
               </a:defRPr>
             </a:pPr>
             <a:r>
-              <a:t>• Complete module1/CHECKLIST.md</a:t>
+              <a:t>• Reuse: The same flow (spec → RTL → testbench) scales</a:t>
             </a:r>
           </a:p>
           <a:p>
@@ -6206,7 +7212,7 @@
               </a:defRPr>
             </a:pPr>
             <a:r>
-              <a:t>• Run ./scripts/module1.sh --check</a:t>
+              <a:t>      to protocol blocks (UART, SPI, I²C) in Modules…</a:t>
             </a:r>
           </a:p>
           <a:p>
@@ -6225,7 +7231,1188 @@
               </a:defRPr>
             </a:pPr>
             <a:r>
-              <a:t>• Next: Design &amp; Verification Methodology (Part 2)</a:t>
+              <a:t>• Documentation: Keep SPEC.md (or similar) next to the</a:t>
+            </a:r>
+          </a:p>
+          <a:p>
+            <a:pPr>
+              <a:lnSpc>
+                <a:spcPts val="2200"/>
+              </a:lnSpc>
+              <a:spcAft>
+                <a:spcPts val="1000"/>
+              </a:spcAft>
+              <a:defRPr sz="2000" b="0">
+                <a:solidFill>
+                  <a:srgbClr val="333333"/>
+                </a:solidFill>
+                <a:latin typeface="Calibri"/>
+              </a:defRPr>
+            </a:pPr>
+            <a:r>
+              <a:t>      RTL so that reviewers and verification can che…</a:t>
+            </a:r>
+          </a:p>
+        </p:txBody>
+      </p:sp>
+      <p:sp>
+        <p:nvSpPr>
+          <p:cNvPr id="4" name="TextBox 3"/>
+          <p:cNvSpPr txBox="1"/>
+          <p:nvPr/>
+        </p:nvSpPr>
+        <p:spPr>
+          <a:xfrm>
+            <a:off x="548640" y="6355080"/>
+            <a:ext cx="11064240" cy="320040"/>
+          </a:xfrm>
+          <a:prstGeom prst="rect">
+            <a:avLst/>
+          </a:prstGeom>
+          <a:noFill/>
+        </p:spPr>
+        <p:txBody>
+          <a:bodyPr wrap="square">
+            <a:noAutofit/>
+          </a:bodyPr>
+          <a:lstStyle/>
+          <a:p>
+            <a:pPr algn="r">
+              <a:lnSpc>
+                <a:spcPts val="2200"/>
+              </a:lnSpc>
+              <a:defRPr sz="1000" b="0">
+                <a:solidFill>
+                  <a:srgbClr val="666666"/>
+                </a:solidFill>
+                <a:latin typeface="Calibri"/>
+              </a:defRPr>
+            </a:pPr>
+            <a:r>
+              <a:t>learn_uart_spi_i2c / Module 1</a:t>
+            </a:r>
+          </a:p>
+        </p:txBody>
+      </p:sp>
+    </p:spTree>
+  </p:cSld>
+  <p:clrMapOvr>
+    <a:masterClrMapping/>
+  </p:clrMapOvr>
+</p:sld>
+</file>
+
+<file path=ppt/slides/slide22.xml><?xml version="1.0" encoding="utf-8"?>
+<p:sld xmlns:a="http://schemas.openxmlformats.org/drawingml/2006/main" xmlns:p="http://schemas.openxmlformats.org/presentationml/2006/main" xmlns:r="http://schemas.openxmlformats.org/officeDocument/2006/relationships">
+  <p:cSld>
+    <p:spTree>
+      <p:nvGrpSpPr>
+        <p:cNvPr id="1" name=""/>
+        <p:cNvGrpSpPr/>
+        <p:nvPr/>
+      </p:nvGrpSpPr>
+      <p:grpSpPr/>
+      <p:sp>
+        <p:nvSpPr>
+          <p:cNvPr id="2" name="TextBox 1"/>
+          <p:cNvSpPr txBox="1"/>
+          <p:nvPr/>
+        </p:nvSpPr>
+        <p:spPr>
+          <a:xfrm>
+            <a:off x="548640" y="411480"/>
+            <a:ext cx="11064240" cy="777240"/>
+          </a:xfrm>
+          <a:prstGeom prst="rect">
+            <a:avLst/>
+          </a:prstGeom>
+          <a:noFill/>
+        </p:spPr>
+        <p:txBody>
+          <a:bodyPr wrap="square">
+            <a:noAutofit/>
+          </a:bodyPr>
+          <a:lstStyle/>
+          <a:p>
+            <a:pPr>
+              <a:lnSpc>
+                <a:spcPts val="2200"/>
+              </a:lnSpc>
+              <a:defRPr sz="2800" b="1">
+                <a:solidFill>
+                  <a:srgbClr val="1A1A2E"/>
+                </a:solidFill>
+                <a:latin typeface="Calibri"/>
+              </a:defRPr>
+            </a:pPr>
+            <a:r>
+              <a:t>3. Intro to Verification: What We Verify, and Why</a:t>
+            </a:r>
+          </a:p>
+        </p:txBody>
+      </p:sp>
+      <p:sp>
+        <p:nvSpPr>
+          <p:cNvPr id="3" name="TextBox 2"/>
+          <p:cNvSpPr txBox="1"/>
+          <p:nvPr/>
+        </p:nvSpPr>
+        <p:spPr>
+          <a:xfrm>
+            <a:off x="548640" y="1234440"/>
+            <a:ext cx="11064240" cy="4937760"/>
+          </a:xfrm>
+          <a:prstGeom prst="rect">
+            <a:avLst/>
+          </a:prstGeom>
+          <a:noFill/>
+        </p:spPr>
+        <p:txBody>
+          <a:bodyPr wrap="square">
+            <a:noAutofit/>
+          </a:bodyPr>
+          <a:lstStyle/>
+          <a:p>
+            <a:pPr>
+              <a:lnSpc>
+                <a:spcPts val="2200"/>
+              </a:lnSpc>
+              <a:spcAft>
+                <a:spcPts val="1000"/>
+              </a:spcAft>
+              <a:defRPr sz="2000" b="0">
+                <a:solidFill>
+                  <a:srgbClr val="333333"/>
+                </a:solidFill>
+                <a:latin typeface="Calibri"/>
+              </a:defRPr>
+            </a:pPr>
+            <a:r>
+              <a:t>• What we verify: That the RTL matches the</a:t>
+            </a:r>
+          </a:p>
+          <a:p>
+            <a:pPr>
+              <a:lnSpc>
+                <a:spcPts val="2200"/>
+              </a:lnSpc>
+              <a:spcAft>
+                <a:spcPts val="1000"/>
+              </a:spcAft>
+              <a:defRPr sz="2000" b="0">
+                <a:solidFill>
+                  <a:srgbClr val="333333"/>
+                </a:solidFill>
+                <a:latin typeface="Calibri"/>
+              </a:defRPr>
+            </a:pPr>
+            <a:r>
+              <a:t>      specification (correct function, reset, enable,</a:t>
+            </a:r>
+          </a:p>
+          <a:p>
+            <a:pPr>
+              <a:lnSpc>
+                <a:spcPts val="2200"/>
+              </a:lnSpc>
+              <a:spcAft>
+                <a:spcPts val="1000"/>
+              </a:spcAft>
+              <a:defRPr sz="2000" b="0">
+                <a:solidFill>
+                  <a:srgbClr val="333333"/>
+                </a:solidFill>
+                <a:latin typeface="Calibri"/>
+              </a:defRPr>
+            </a:pPr>
+            <a:r>
+              <a:t>      boundaries…</a:t>
+            </a:r>
+          </a:p>
+          <a:p>
+            <a:pPr>
+              <a:lnSpc>
+                <a:spcPts val="2200"/>
+              </a:lnSpc>
+              <a:spcAft>
+                <a:spcPts val="1000"/>
+              </a:spcAft>
+              <a:defRPr sz="2000" b="0">
+                <a:solidFill>
+                  <a:srgbClr val="333333"/>
+                </a:solidFill>
+                <a:latin typeface="Calibri"/>
+              </a:defRPr>
+            </a:pPr>
+            <a:r>
+              <a:t>• Why we verify: Finding bugs in RTL is far cheaper</a:t>
+            </a:r>
+          </a:p>
+          <a:p>
+            <a:pPr>
+              <a:lnSpc>
+                <a:spcPts val="2200"/>
+              </a:lnSpc>
+              <a:spcAft>
+                <a:spcPts val="1000"/>
+              </a:spcAft>
+              <a:defRPr sz="2000" b="0">
+                <a:solidFill>
+                  <a:srgbClr val="333333"/>
+                </a:solidFill>
+                <a:latin typeface="Calibri"/>
+              </a:defRPr>
+            </a:pPr>
+            <a:r>
+              <a:t>      than finding them in silicon or in system integra…</a:t>
+            </a:r>
+          </a:p>
+          <a:p>
+            <a:pPr>
+              <a:lnSpc>
+                <a:spcPts val="2200"/>
+              </a:lnSpc>
+              <a:spcAft>
+                <a:spcPts val="1000"/>
+              </a:spcAft>
+              <a:defRPr sz="2000" b="0">
+                <a:solidFill>
+                  <a:srgbClr val="333333"/>
+                </a:solidFill>
+                <a:latin typeface="Calibri"/>
+              </a:defRPr>
+            </a:pPr>
+            <a:r>
+              <a:t>• Directed test: A simple test that drives specific</a:t>
+            </a:r>
+          </a:p>
+          <a:p>
+            <a:pPr>
+              <a:lnSpc>
+                <a:spcPts val="2200"/>
+              </a:lnSpc>
+              <a:spcAft>
+                <a:spcPts val="1000"/>
+              </a:spcAft>
+              <a:defRPr sz="2000" b="0">
+                <a:solidFill>
+                  <a:srgbClr val="333333"/>
+                </a:solidFill>
+                <a:latin typeface="Calibri"/>
+              </a:defRPr>
+            </a:pPr>
+            <a:r>
+              <a:t>      inputs (e.g., reset, then 10 enabled cycles) and…</a:t>
+            </a:r>
+          </a:p>
+        </p:txBody>
+      </p:sp>
+      <p:sp>
+        <p:nvSpPr>
+          <p:cNvPr id="4" name="TextBox 3"/>
+          <p:cNvSpPr txBox="1"/>
+          <p:nvPr/>
+        </p:nvSpPr>
+        <p:spPr>
+          <a:xfrm>
+            <a:off x="548640" y="6355080"/>
+            <a:ext cx="11064240" cy="320040"/>
+          </a:xfrm>
+          <a:prstGeom prst="rect">
+            <a:avLst/>
+          </a:prstGeom>
+          <a:noFill/>
+        </p:spPr>
+        <p:txBody>
+          <a:bodyPr wrap="square">
+            <a:noAutofit/>
+          </a:bodyPr>
+          <a:lstStyle/>
+          <a:p>
+            <a:pPr algn="r">
+              <a:lnSpc>
+                <a:spcPts val="2200"/>
+              </a:lnSpc>
+              <a:defRPr sz="1000" b="0">
+                <a:solidFill>
+                  <a:srgbClr val="666666"/>
+                </a:solidFill>
+                <a:latin typeface="Calibri"/>
+              </a:defRPr>
+            </a:pPr>
+            <a:r>
+              <a:t>learn_uart_spi_i2c / Module 1</a:t>
+            </a:r>
+          </a:p>
+        </p:txBody>
+      </p:sp>
+    </p:spTree>
+  </p:cSld>
+  <p:clrMapOvr>
+    <a:masterClrMapping/>
+  </p:clrMapOvr>
+</p:sld>
+</file>
+
+<file path=ppt/slides/slide23.xml><?xml version="1.0" encoding="utf-8"?>
+<p:sld xmlns:a="http://schemas.openxmlformats.org/drawingml/2006/main" xmlns:p="http://schemas.openxmlformats.org/presentationml/2006/main" xmlns:r="http://schemas.openxmlformats.org/officeDocument/2006/relationships">
+  <p:cSld>
+    <p:spTree>
+      <p:nvGrpSpPr>
+        <p:cNvPr id="1" name=""/>
+        <p:cNvGrpSpPr/>
+        <p:nvPr/>
+      </p:nvGrpSpPr>
+      <p:grpSpPr/>
+      <p:sp>
+        <p:nvSpPr>
+          <p:cNvPr id="2" name="TextBox 1"/>
+          <p:cNvSpPr txBox="1"/>
+          <p:nvPr/>
+        </p:nvSpPr>
+        <p:spPr>
+          <a:xfrm>
+            <a:off x="548640" y="2743200"/>
+            <a:ext cx="11064240" cy="1371600"/>
+          </a:xfrm>
+          <a:prstGeom prst="rect">
+            <a:avLst/>
+          </a:prstGeom>
+          <a:noFill/>
+        </p:spPr>
+        <p:txBody>
+          <a:bodyPr wrap="square">
+            <a:noAutofit/>
+          </a:bodyPr>
+          <a:lstStyle/>
+          <a:p>
+            <a:pPr algn="ctr">
+              <a:lnSpc>
+                <a:spcPts val="2200"/>
+              </a:lnSpc>
+              <a:defRPr sz="3600" b="1">
+                <a:solidFill>
+                  <a:srgbClr val="1A1A2E"/>
+                </a:solidFill>
+                <a:latin typeface="Calibri"/>
+              </a:defRPr>
+            </a:pPr>
+            <a:r>
+              <a:t>Command reference highlights</a:t>
+            </a:r>
+          </a:p>
+        </p:txBody>
+      </p:sp>
+      <p:sp>
+        <p:nvSpPr>
+          <p:cNvPr id="3" name="TextBox 2"/>
+          <p:cNvSpPr txBox="1"/>
+          <p:nvPr/>
+        </p:nvSpPr>
+        <p:spPr>
+          <a:xfrm>
+            <a:off x="548640" y="6355080"/>
+            <a:ext cx="11064240" cy="320040"/>
+          </a:xfrm>
+          <a:prstGeom prst="rect">
+            <a:avLst/>
+          </a:prstGeom>
+          <a:noFill/>
+        </p:spPr>
+        <p:txBody>
+          <a:bodyPr wrap="square">
+            <a:noAutofit/>
+          </a:bodyPr>
+          <a:lstStyle/>
+          <a:p>
+            <a:pPr algn="r">
+              <a:lnSpc>
+                <a:spcPts val="2200"/>
+              </a:lnSpc>
+              <a:defRPr sz="1000" b="0">
+                <a:solidFill>
+                  <a:srgbClr val="666666"/>
+                </a:solidFill>
+                <a:latin typeface="Calibri"/>
+              </a:defRPr>
+            </a:pPr>
+            <a:r>
+              <a:t>learn_uart_spi_i2c / Module 1</a:t>
+            </a:r>
+          </a:p>
+        </p:txBody>
+      </p:sp>
+    </p:spTree>
+  </p:cSld>
+  <p:clrMapOvr>
+    <a:masterClrMapping/>
+  </p:clrMapOvr>
+</p:sld>
+</file>
+
+<file path=ppt/slides/slide24.xml><?xml version="1.0" encoding="utf-8"?>
+<p:sld xmlns:a="http://schemas.openxmlformats.org/drawingml/2006/main" xmlns:p="http://schemas.openxmlformats.org/presentationml/2006/main" xmlns:r="http://schemas.openxmlformats.org/officeDocument/2006/relationships">
+  <p:cSld>
+    <p:spTree>
+      <p:nvGrpSpPr>
+        <p:cNvPr id="1" name=""/>
+        <p:cNvGrpSpPr/>
+        <p:nvPr/>
+      </p:nvGrpSpPr>
+      <p:grpSpPr/>
+      <p:sp>
+        <p:nvSpPr>
+          <p:cNvPr id="2" name="TextBox 1"/>
+          <p:cNvSpPr txBox="1"/>
+          <p:nvPr/>
+        </p:nvSpPr>
+        <p:spPr>
+          <a:xfrm>
+            <a:off x="548640" y="411480"/>
+            <a:ext cx="11064240" cy="777240"/>
+          </a:xfrm>
+          <a:prstGeom prst="rect">
+            <a:avLst/>
+          </a:prstGeom>
+          <a:noFill/>
+        </p:spPr>
+        <p:txBody>
+          <a:bodyPr wrap="square">
+            <a:noAutofit/>
+          </a:bodyPr>
+          <a:lstStyle/>
+          <a:p>
+            <a:pPr>
+              <a:lnSpc>
+                <a:spcPts val="2200"/>
+              </a:lnSpc>
+              <a:defRPr sz="2800" b="1">
+                <a:solidFill>
+                  <a:srgbClr val="1A1A2E"/>
+                </a:solidFill>
+                <a:latin typeface="Calibri"/>
+              </a:defRPr>
+            </a:pPr>
+            <a:r>
+              <a:t>Environment checks</a:t>
+            </a:r>
+          </a:p>
+        </p:txBody>
+      </p:sp>
+      <p:sp>
+        <p:nvSpPr>
+          <p:cNvPr id="3" name="TextBox 2"/>
+          <p:cNvSpPr txBox="1"/>
+          <p:nvPr/>
+        </p:nvSpPr>
+        <p:spPr>
+          <a:xfrm>
+            <a:off x="548640" y="1234440"/>
+            <a:ext cx="11064240" cy="4937760"/>
+          </a:xfrm>
+          <a:prstGeom prst="rect">
+            <a:avLst/>
+          </a:prstGeom>
+          <a:noFill/>
+        </p:spPr>
+        <p:txBody>
+          <a:bodyPr wrap="square">
+            <a:noAutofit/>
+          </a:bodyPr>
+          <a:lstStyle/>
+          <a:p>
+            <a:pPr>
+              <a:lnSpc>
+                <a:spcPts val="2200"/>
+              </a:lnSpc>
+              <a:spcAft>
+                <a:spcPts val="1000"/>
+              </a:spcAft>
+              <a:defRPr sz="2000" b="0">
+                <a:solidFill>
+                  <a:srgbClr val="333333"/>
+                </a:solidFill>
+                <a:latin typeface="Calibri"/>
+              </a:defRPr>
+            </a:pPr>
+            <a:r>
+              <a:t>• verilator --version</a:t>
+            </a:r>
+          </a:p>
+        </p:txBody>
+      </p:sp>
+      <p:sp>
+        <p:nvSpPr>
+          <p:cNvPr id="4" name="TextBox 3"/>
+          <p:cNvSpPr txBox="1"/>
+          <p:nvPr/>
+        </p:nvSpPr>
+        <p:spPr>
+          <a:xfrm>
+            <a:off x="548640" y="6355080"/>
+            <a:ext cx="11064240" cy="320040"/>
+          </a:xfrm>
+          <a:prstGeom prst="rect">
+            <a:avLst/>
+          </a:prstGeom>
+          <a:noFill/>
+        </p:spPr>
+        <p:txBody>
+          <a:bodyPr wrap="square">
+            <a:noAutofit/>
+          </a:bodyPr>
+          <a:lstStyle/>
+          <a:p>
+            <a:pPr algn="r">
+              <a:lnSpc>
+                <a:spcPts val="2200"/>
+              </a:lnSpc>
+              <a:defRPr sz="1000" b="0">
+                <a:solidFill>
+                  <a:srgbClr val="666666"/>
+                </a:solidFill>
+                <a:latin typeface="Calibri"/>
+              </a:defRPr>
+            </a:pPr>
+            <a:r>
+              <a:t>learn_uart_spi_i2c / Module 1</a:t>
+            </a:r>
+          </a:p>
+        </p:txBody>
+      </p:sp>
+    </p:spTree>
+  </p:cSld>
+  <p:clrMapOvr>
+    <a:masterClrMapping/>
+  </p:clrMapOvr>
+</p:sld>
+</file>
+
+<file path=ppt/slides/slide25.xml><?xml version="1.0" encoding="utf-8"?>
+<p:sld xmlns:a="http://schemas.openxmlformats.org/drawingml/2006/main" xmlns:p="http://schemas.openxmlformats.org/presentationml/2006/main" xmlns:r="http://schemas.openxmlformats.org/officeDocument/2006/relationships">
+  <p:cSld>
+    <p:spTree>
+      <p:nvGrpSpPr>
+        <p:cNvPr id="1" name=""/>
+        <p:cNvGrpSpPr/>
+        <p:nvPr/>
+      </p:nvGrpSpPr>
+      <p:grpSpPr/>
+      <p:sp>
+        <p:nvSpPr>
+          <p:cNvPr id="2" name="TextBox 1"/>
+          <p:cNvSpPr txBox="1"/>
+          <p:nvPr/>
+        </p:nvSpPr>
+        <p:spPr>
+          <a:xfrm>
+            <a:off x="548640" y="411480"/>
+            <a:ext cx="11064240" cy="777240"/>
+          </a:xfrm>
+          <a:prstGeom prst="rect">
+            <a:avLst/>
+          </a:prstGeom>
+          <a:noFill/>
+        </p:spPr>
+        <p:txBody>
+          <a:bodyPr wrap="square">
+            <a:noAutofit/>
+          </a:bodyPr>
+          <a:lstStyle/>
+          <a:p>
+            <a:pPr>
+              <a:lnSpc>
+                <a:spcPts val="2200"/>
+              </a:lnSpc>
+              <a:defRPr sz="2800" b="1">
+                <a:solidFill>
+                  <a:srgbClr val="1A1A2E"/>
+                </a:solidFill>
+                <a:latin typeface="Calibri"/>
+              </a:defRPr>
+            </a:pPr>
+            <a:r>
+              <a:t>Build and run spec_to_rtl</a:t>
+            </a:r>
+          </a:p>
+        </p:txBody>
+      </p:sp>
+      <p:sp>
+        <p:nvSpPr>
+          <p:cNvPr id="3" name="TextBox 2"/>
+          <p:cNvSpPr txBox="1"/>
+          <p:nvPr/>
+        </p:nvSpPr>
+        <p:spPr>
+          <a:xfrm>
+            <a:off x="548640" y="1234440"/>
+            <a:ext cx="11064240" cy="4937760"/>
+          </a:xfrm>
+          <a:prstGeom prst="rect">
+            <a:avLst/>
+          </a:prstGeom>
+          <a:noFill/>
+        </p:spPr>
+        <p:txBody>
+          <a:bodyPr wrap="square">
+            <a:noAutofit/>
+          </a:bodyPr>
+          <a:lstStyle/>
+          <a:p>
+            <a:pPr>
+              <a:lnSpc>
+                <a:spcPts val="2200"/>
+              </a:lnSpc>
+              <a:spcAft>
+                <a:spcPts val="1000"/>
+              </a:spcAft>
+              <a:defRPr sz="2000" b="0">
+                <a:solidFill>
+                  <a:srgbClr val="333333"/>
+                </a:solidFill>
+                <a:latin typeface="Calibri"/>
+              </a:defRPr>
+            </a:pPr>
+            <a:r>
+              <a:t>• cd module1/examples/spec_to_rtl</a:t>
+            </a:r>
+          </a:p>
+        </p:txBody>
+      </p:sp>
+      <p:sp>
+        <p:nvSpPr>
+          <p:cNvPr id="4" name="TextBox 3"/>
+          <p:cNvSpPr txBox="1"/>
+          <p:nvPr/>
+        </p:nvSpPr>
+        <p:spPr>
+          <a:xfrm>
+            <a:off x="548640" y="6355080"/>
+            <a:ext cx="11064240" cy="320040"/>
+          </a:xfrm>
+          <a:prstGeom prst="rect">
+            <a:avLst/>
+          </a:prstGeom>
+          <a:noFill/>
+        </p:spPr>
+        <p:txBody>
+          <a:bodyPr wrap="square">
+            <a:noAutofit/>
+          </a:bodyPr>
+          <a:lstStyle/>
+          <a:p>
+            <a:pPr algn="r">
+              <a:lnSpc>
+                <a:spcPts val="2200"/>
+              </a:lnSpc>
+              <a:defRPr sz="1000" b="0">
+                <a:solidFill>
+                  <a:srgbClr val="666666"/>
+                </a:solidFill>
+                <a:latin typeface="Calibri"/>
+              </a:defRPr>
+            </a:pPr>
+            <a:r>
+              <a:t>learn_uart_spi_i2c / Module 1</a:t>
+            </a:r>
+          </a:p>
+        </p:txBody>
+      </p:sp>
+    </p:spTree>
+  </p:cSld>
+  <p:clrMapOvr>
+    <a:masterClrMapping/>
+  </p:clrMapOvr>
+</p:sld>
+</file>
+
+<file path=ppt/slides/slide26.xml><?xml version="1.0" encoding="utf-8"?>
+<p:sld xmlns:a="http://schemas.openxmlformats.org/drawingml/2006/main" xmlns:p="http://schemas.openxmlformats.org/presentationml/2006/main" xmlns:r="http://schemas.openxmlformats.org/officeDocument/2006/relationships">
+  <p:cSld>
+    <p:spTree>
+      <p:nvGrpSpPr>
+        <p:cNvPr id="1" name=""/>
+        <p:cNvGrpSpPr/>
+        <p:nvPr/>
+      </p:nvGrpSpPr>
+      <p:grpSpPr/>
+      <p:sp>
+        <p:nvSpPr>
+          <p:cNvPr id="2" name="TextBox 1"/>
+          <p:cNvSpPr txBox="1"/>
+          <p:nvPr/>
+        </p:nvSpPr>
+        <p:spPr>
+          <a:xfrm>
+            <a:off x="548640" y="411480"/>
+            <a:ext cx="11064240" cy="777240"/>
+          </a:xfrm>
+          <a:prstGeom prst="rect">
+            <a:avLst/>
+          </a:prstGeom>
+          <a:noFill/>
+        </p:spPr>
+        <p:txBody>
+          <a:bodyPr wrap="square">
+            <a:noAutofit/>
+          </a:bodyPr>
+          <a:lstStyle/>
+          <a:p>
+            <a:pPr>
+              <a:lnSpc>
+                <a:spcPts val="2200"/>
+              </a:lnSpc>
+              <a:defRPr sz="2800" b="1">
+                <a:solidFill>
+                  <a:srgbClr val="1A1A2E"/>
+                </a:solidFill>
+                <a:latin typeface="Calibri"/>
+              </a:defRPr>
+            </a:pPr>
+            <a:r>
+              <a:t>Module script (from repo root)</a:t>
+            </a:r>
+          </a:p>
+        </p:txBody>
+      </p:sp>
+      <p:sp>
+        <p:nvSpPr>
+          <p:cNvPr id="3" name="TextBox 2"/>
+          <p:cNvSpPr txBox="1"/>
+          <p:nvPr/>
+        </p:nvSpPr>
+        <p:spPr>
+          <a:xfrm>
+            <a:off x="548640" y="1234440"/>
+            <a:ext cx="11064240" cy="4937760"/>
+          </a:xfrm>
+          <a:prstGeom prst="rect">
+            <a:avLst/>
+          </a:prstGeom>
+          <a:noFill/>
+        </p:spPr>
+        <p:txBody>
+          <a:bodyPr wrap="square">
+            <a:noAutofit/>
+          </a:bodyPr>
+          <a:lstStyle/>
+          <a:p>
+            <a:pPr>
+              <a:lnSpc>
+                <a:spcPts val="2200"/>
+              </a:lnSpc>
+              <a:spcAft>
+                <a:spcPts val="1000"/>
+              </a:spcAft>
+              <a:defRPr sz="2000" b="0">
+                <a:solidFill>
+                  <a:srgbClr val="333333"/>
+                </a:solidFill>
+                <a:latin typeface="Calibri"/>
+              </a:defRPr>
+            </a:pPr>
+            <a:r>
+              <a:t>• ./scripts/module1.sh --check # Environment only</a:t>
+            </a:r>
+          </a:p>
+        </p:txBody>
+      </p:sp>
+      <p:sp>
+        <p:nvSpPr>
+          <p:cNvPr id="4" name="TextBox 3"/>
+          <p:cNvSpPr txBox="1"/>
+          <p:nvPr/>
+        </p:nvSpPr>
+        <p:spPr>
+          <a:xfrm>
+            <a:off x="548640" y="6355080"/>
+            <a:ext cx="11064240" cy="320040"/>
+          </a:xfrm>
+          <a:prstGeom prst="rect">
+            <a:avLst/>
+          </a:prstGeom>
+          <a:noFill/>
+        </p:spPr>
+        <p:txBody>
+          <a:bodyPr wrap="square">
+            <a:noAutofit/>
+          </a:bodyPr>
+          <a:lstStyle/>
+          <a:p>
+            <a:pPr algn="r">
+              <a:lnSpc>
+                <a:spcPts val="2200"/>
+              </a:lnSpc>
+              <a:defRPr sz="1000" b="0">
+                <a:solidFill>
+                  <a:srgbClr val="666666"/>
+                </a:solidFill>
+                <a:latin typeface="Calibri"/>
+              </a:defRPr>
+            </a:pPr>
+            <a:r>
+              <a:t>learn_uart_spi_i2c / Module 1</a:t>
+            </a:r>
+          </a:p>
+        </p:txBody>
+      </p:sp>
+    </p:spTree>
+  </p:cSld>
+  <p:clrMapOvr>
+    <a:masterClrMapping/>
+  </p:clrMapOvr>
+</p:sld>
+</file>
+
+<file path=ppt/slides/slide27.xml><?xml version="1.0" encoding="utf-8"?>
+<p:sld xmlns:a="http://schemas.openxmlformats.org/drawingml/2006/main" xmlns:p="http://schemas.openxmlformats.org/presentationml/2006/main" xmlns:r="http://schemas.openxmlformats.org/officeDocument/2006/relationships">
+  <p:cSld>
+    <p:spTree>
+      <p:nvGrpSpPr>
+        <p:cNvPr id="1" name=""/>
+        <p:cNvGrpSpPr/>
+        <p:nvPr/>
+      </p:nvGrpSpPr>
+      <p:grpSpPr/>
+      <p:sp>
+        <p:nvSpPr>
+          <p:cNvPr id="2" name="TextBox 1"/>
+          <p:cNvSpPr txBox="1"/>
+          <p:nvPr/>
+        </p:nvSpPr>
+        <p:spPr>
+          <a:xfrm>
+            <a:off x="548640" y="2743200"/>
+            <a:ext cx="11064240" cy="1371600"/>
+          </a:xfrm>
+          <a:prstGeom prst="rect">
+            <a:avLst/>
+          </a:prstGeom>
+          <a:noFill/>
+        </p:spPr>
+        <p:txBody>
+          <a:bodyPr wrap="square">
+            <a:noAutofit/>
+          </a:bodyPr>
+          <a:lstStyle/>
+          <a:p>
+            <a:pPr algn="ctr">
+              <a:lnSpc>
+                <a:spcPts val="2200"/>
+              </a:lnSpc>
+              <a:defRPr sz="3600" b="1">
+                <a:solidFill>
+                  <a:srgbClr val="1A1A2E"/>
+                </a:solidFill>
+                <a:latin typeface="Calibri"/>
+              </a:defRPr>
+            </a:pPr>
+            <a:r>
+              <a:t>Hands-on examples</a:t>
+            </a:r>
+          </a:p>
+        </p:txBody>
+      </p:sp>
+      <p:sp>
+        <p:nvSpPr>
+          <p:cNvPr id="3" name="TextBox 2"/>
+          <p:cNvSpPr txBox="1"/>
+          <p:nvPr/>
+        </p:nvSpPr>
+        <p:spPr>
+          <a:xfrm>
+            <a:off x="548640" y="6355080"/>
+            <a:ext cx="11064240" cy="320040"/>
+          </a:xfrm>
+          <a:prstGeom prst="rect">
+            <a:avLst/>
+          </a:prstGeom>
+          <a:noFill/>
+        </p:spPr>
+        <p:txBody>
+          <a:bodyPr wrap="square">
+            <a:noAutofit/>
+          </a:bodyPr>
+          <a:lstStyle/>
+          <a:p>
+            <a:pPr algn="r">
+              <a:lnSpc>
+                <a:spcPts val="2200"/>
+              </a:lnSpc>
+              <a:defRPr sz="1000" b="0">
+                <a:solidFill>
+                  <a:srgbClr val="666666"/>
+                </a:solidFill>
+                <a:latin typeface="Calibri"/>
+              </a:defRPr>
+            </a:pPr>
+            <a:r>
+              <a:t>learn_uart_spi_i2c / Module 1</a:t>
+            </a:r>
+          </a:p>
+        </p:txBody>
+      </p:sp>
+    </p:spTree>
+  </p:cSld>
+  <p:clrMapOvr>
+    <a:masterClrMapping/>
+  </p:clrMapOvr>
+</p:sld>
+</file>
+
+<file path=ppt/slides/slide28.xml><?xml version="1.0" encoding="utf-8"?>
+<p:sld xmlns:a="http://schemas.openxmlformats.org/drawingml/2006/main" xmlns:p="http://schemas.openxmlformats.org/presentationml/2006/main" xmlns:r="http://schemas.openxmlformats.org/officeDocument/2006/relationships">
+  <p:cSld>
+    <p:spTree>
+      <p:nvGrpSpPr>
+        <p:cNvPr id="1" name=""/>
+        <p:cNvGrpSpPr/>
+        <p:nvPr/>
+      </p:nvGrpSpPr>
+      <p:grpSpPr/>
+      <p:sp>
+        <p:nvSpPr>
+          <p:cNvPr id="2" name="TextBox 1"/>
+          <p:cNvSpPr txBox="1"/>
+          <p:nvPr/>
+        </p:nvSpPr>
+        <p:spPr>
+          <a:xfrm>
+            <a:off x="548640" y="411480"/>
+            <a:ext cx="11064240" cy="777240"/>
+          </a:xfrm>
+          <a:prstGeom prst="rect">
+            <a:avLst/>
+          </a:prstGeom>
+          <a:noFill/>
+        </p:spPr>
+        <p:txBody>
+          <a:bodyPr wrap="square">
+            <a:noAutofit/>
+          </a:bodyPr>
+          <a:lstStyle/>
+          <a:p>
+            <a:pPr>
+              <a:lnSpc>
+                <a:spcPts val="2200"/>
+              </a:lnSpc>
+              <a:defRPr sz="2800" b="1">
+                <a:solidFill>
+                  <a:srgbClr val="1A1A2E"/>
+                </a:solidFill>
+                <a:latin typeface="Calibri"/>
+              </a:defRPr>
+            </a:pPr>
+            <a:r>
+              <a:t>Module 1 self-check</a:t>
+            </a:r>
+          </a:p>
+        </p:txBody>
+      </p:sp>
+      <p:sp>
+        <p:nvSpPr>
+          <p:cNvPr id="3" name="TextBox 2"/>
+          <p:cNvSpPr txBox="1"/>
+          <p:nvPr/>
+        </p:nvSpPr>
+        <p:spPr>
+          <a:xfrm>
+            <a:off x="548640" y="1051560"/>
+            <a:ext cx="11064240" cy="914400"/>
+          </a:xfrm>
+          <a:prstGeom prst="rect">
+            <a:avLst/>
+          </a:prstGeom>
+          <a:solidFill>
+            <a:srgbClr val="F4F4F4"/>
+          </a:solidFill>
+        </p:spPr>
+        <p:txBody>
+          <a:bodyPr wrap="square">
+            <a:noAutofit/>
+          </a:bodyPr>
+          <a:lstStyle/>
+          <a:p>
+            <a:pPr>
+              <a:lnSpc>
+                <a:spcPts val="2200"/>
+              </a:lnSpc>
+              <a:spcAft>
+                <a:spcPts val="200"/>
+              </a:spcAft>
+              <a:defRPr sz="2000" b="0">
+                <a:solidFill>
+                  <a:srgbClr val="333333"/>
+                </a:solidFill>
+                <a:latin typeface="Consolas"/>
+              </a:defRPr>
+            </a:pPr>
+            <a:r>
+              <a:t>$ ./scripts/module1.sh --help</a:t>
+            </a:r>
+          </a:p>
+        </p:txBody>
+      </p:sp>
+      <p:pic>
+        <p:nvPicPr>
+          <p:cNvPr id="4" name="Picture 3" descr="module1_check.png"/>
+          <p:cNvPicPr>
+            <a:picLocks noChangeAspect="1"/>
+          </p:cNvPicPr>
+          <p:nvPr/>
+        </p:nvPicPr>
+        <p:blipFill>
+          <a:blip r:embed="rId2"/>
+          <a:stretch>
+            <a:fillRect/>
+          </a:stretch>
+        </p:blipFill>
+        <p:spPr>
+          <a:xfrm>
+            <a:off x="548640" y="1965960"/>
+            <a:ext cx="7071358" cy="3977639"/>
+          </a:xfrm>
+          <a:prstGeom prst="rect">
+            <a:avLst/>
+          </a:prstGeom>
+        </p:spPr>
+      </p:pic>
+      <p:sp>
+        <p:nvSpPr>
+          <p:cNvPr id="5" name="TextBox 4"/>
+          <p:cNvSpPr txBox="1"/>
+          <p:nvPr/>
+        </p:nvSpPr>
+        <p:spPr>
+          <a:xfrm>
+            <a:off x="548640" y="6355080"/>
+            <a:ext cx="11064240" cy="320040"/>
+          </a:xfrm>
+          <a:prstGeom prst="rect">
+            <a:avLst/>
+          </a:prstGeom>
+          <a:noFill/>
+        </p:spPr>
+        <p:txBody>
+          <a:bodyPr wrap="square">
+            <a:noAutofit/>
+          </a:bodyPr>
+          <a:lstStyle/>
+          <a:p>
+            <a:pPr algn="r">
+              <a:lnSpc>
+                <a:spcPts val="2200"/>
+              </a:lnSpc>
+              <a:defRPr sz="1000" b="0">
+                <a:solidFill>
+                  <a:srgbClr val="666666"/>
+                </a:solidFill>
+                <a:latin typeface="Calibri"/>
+              </a:defRPr>
+            </a:pPr>
+            <a:r>
+              <a:t>learn_uart_spi_i2c / Module 1</a:t>
+            </a:r>
+          </a:p>
+        </p:txBody>
+      </p:sp>
+    </p:spTree>
+  </p:cSld>
+  <p:clrMapOvr>
+    <a:masterClrMapping/>
+  </p:clrMapOvr>
+</p:sld>
+</file>
+
+<file path=ppt/slides/slide29.xml><?xml version="1.0" encoding="utf-8"?>
+<p:sld xmlns:a="http://schemas.openxmlformats.org/drawingml/2006/main" xmlns:p="http://schemas.openxmlformats.org/presentationml/2006/main" xmlns:r="http://schemas.openxmlformats.org/officeDocument/2006/relationships">
+  <p:cSld>
+    <p:spTree>
+      <p:nvGrpSpPr>
+        <p:cNvPr id="1" name=""/>
+        <p:cNvGrpSpPr/>
+        <p:nvPr/>
+      </p:nvGrpSpPr>
+      <p:grpSpPr/>
+      <p:sp>
+        <p:nvSpPr>
+          <p:cNvPr id="2" name="TextBox 1"/>
+          <p:cNvSpPr txBox="1"/>
+          <p:nvPr/>
+        </p:nvSpPr>
+        <p:spPr>
+          <a:xfrm>
+            <a:off x="548640" y="411480"/>
+            <a:ext cx="11064240" cy="777240"/>
+          </a:xfrm>
+          <a:prstGeom prst="rect">
+            <a:avLst/>
+          </a:prstGeom>
+          <a:noFill/>
+        </p:spPr>
+        <p:txBody>
+          <a:bodyPr wrap="square">
+            <a:noAutofit/>
+          </a:bodyPr>
+          <a:lstStyle/>
+          <a:p>
+            <a:pPr>
+              <a:lnSpc>
+                <a:spcPts val="2200"/>
+              </a:lnSpc>
+              <a:defRPr sz="2800" b="1">
+                <a:solidFill>
+                  <a:srgbClr val="1A1A2E"/>
+                </a:solidFill>
+                <a:latin typeface="Calibri"/>
+              </a:defRPr>
+            </a:pPr>
+            <a:r>
+              <a:t>Exercise scaffold</a:t>
+            </a:r>
+          </a:p>
+        </p:txBody>
+      </p:sp>
+      <p:sp>
+        <p:nvSpPr>
+          <p:cNvPr id="3" name="TextBox 2"/>
+          <p:cNvSpPr txBox="1"/>
+          <p:nvPr/>
+        </p:nvSpPr>
+        <p:spPr>
+          <a:xfrm>
+            <a:off x="548640" y="1143000"/>
+            <a:ext cx="11064240" cy="5029200"/>
+          </a:xfrm>
+          <a:prstGeom prst="rect">
+            <a:avLst/>
+          </a:prstGeom>
+          <a:solidFill>
+            <a:srgbClr val="F4F4F4"/>
+          </a:solidFill>
+        </p:spPr>
+        <p:txBody>
+          <a:bodyPr wrap="square">
+            <a:noAutofit/>
+          </a:bodyPr>
+          <a:lstStyle/>
+          <a:p>
+            <a:pPr>
+              <a:lnSpc>
+                <a:spcPts val="2200"/>
+              </a:lnSpc>
+              <a:spcAft>
+                <a:spcPts val="400"/>
+              </a:spcAft>
+              <a:defRPr sz="2000" b="0">
+                <a:solidFill>
+                  <a:srgbClr val="333333"/>
+                </a:solidFill>
+                <a:latin typeface="Consolas"/>
+              </a:defRPr>
+            </a:pPr>
+            <a:r>
+              <a:t>./scripts/module1.sh --scaffold</a:t>
             </a:r>
           </a:p>
         </p:txBody>
@@ -6472,6 +8659,1355 @@
 </p:sld>
 </file>
 
+<file path=ppt/slides/slide30.xml><?xml version="1.0" encoding="utf-8"?>
+<p:sld xmlns:a="http://schemas.openxmlformats.org/drawingml/2006/main" xmlns:p="http://schemas.openxmlformats.org/presentationml/2006/main" xmlns:r="http://schemas.openxmlformats.org/officeDocument/2006/relationships">
+  <p:cSld>
+    <p:spTree>
+      <p:nvGrpSpPr>
+        <p:cNvPr id="1" name=""/>
+        <p:cNvGrpSpPr/>
+        <p:nvPr/>
+      </p:nvGrpSpPr>
+      <p:grpSpPr/>
+      <p:sp>
+        <p:nvSpPr>
+          <p:cNvPr id="2" name="TextBox 1"/>
+          <p:cNvSpPr txBox="1"/>
+          <p:nvPr/>
+        </p:nvSpPr>
+        <p:spPr>
+          <a:xfrm>
+            <a:off x="548640" y="411480"/>
+            <a:ext cx="11064240" cy="777240"/>
+          </a:xfrm>
+          <a:prstGeom prst="rect">
+            <a:avLst/>
+          </a:prstGeom>
+          <a:noFill/>
+        </p:spPr>
+        <p:txBody>
+          <a:bodyPr wrap="square">
+            <a:noAutofit/>
+          </a:bodyPr>
+          <a:lstStyle/>
+          <a:p>
+            <a:pPr>
+              <a:lnSpc>
+                <a:spcPts val="2200"/>
+              </a:lnSpc>
+              <a:defRPr sz="2800" b="1">
+                <a:solidFill>
+                  <a:srgbClr val="1A1A2E"/>
+                </a:solidFill>
+                <a:latin typeface="Calibri"/>
+              </a:defRPr>
+            </a:pPr>
+            <a:r>
+              <a:t>Example 1: Spec-to-RTL example</a:t>
+            </a:r>
+          </a:p>
+        </p:txBody>
+      </p:sp>
+      <p:sp>
+        <p:nvSpPr>
+          <p:cNvPr id="3" name="TextBox 2"/>
+          <p:cNvSpPr txBox="1"/>
+          <p:nvPr/>
+        </p:nvSpPr>
+        <p:spPr>
+          <a:xfrm>
+            <a:off x="548640" y="1234440"/>
+            <a:ext cx="11064240" cy="4937760"/>
+          </a:xfrm>
+          <a:prstGeom prst="rect">
+            <a:avLst/>
+          </a:prstGeom>
+          <a:noFill/>
+        </p:spPr>
+        <p:txBody>
+          <a:bodyPr wrap="square">
+            <a:noAutofit/>
+          </a:bodyPr>
+          <a:lstStyle/>
+          <a:p>
+            <a:pPr>
+              <a:lnSpc>
+                <a:spcPts val="2200"/>
+              </a:lnSpc>
+              <a:spcAft>
+                <a:spcPts val="1000"/>
+              </a:spcAft>
+              <a:defRPr sz="2000" b="0">
+                <a:solidFill>
+                  <a:srgbClr val="333333"/>
+                </a:solidFill>
+                <a:latin typeface="Calibri"/>
+              </a:defRPr>
+            </a:pPr>
+            <a:r>
+              <a:t>• [examples/spec_to_rtl/WALKTHROUGH.md](examples/spec_</a:t>
+            </a:r>
+          </a:p>
+          <a:p>
+            <a:pPr>
+              <a:lnSpc>
+                <a:spcPts val="2200"/>
+              </a:lnSpc>
+              <a:spcAft>
+                <a:spcPts val="1000"/>
+              </a:spcAft>
+              <a:defRPr sz="2000" b="0">
+                <a:solidFill>
+                  <a:srgbClr val="333333"/>
+                </a:solidFill>
+                <a:latin typeface="Calibri"/>
+              </a:defRPr>
+            </a:pPr>
+            <a:r>
+              <a:t>      to_rtl/WALKTHROUGH.md) — Section-by-section rea…</a:t>
+            </a:r>
+          </a:p>
+        </p:txBody>
+      </p:sp>
+      <p:sp>
+        <p:nvSpPr>
+          <p:cNvPr id="4" name="TextBox 3"/>
+          <p:cNvSpPr txBox="1"/>
+          <p:nvPr/>
+        </p:nvSpPr>
+        <p:spPr>
+          <a:xfrm>
+            <a:off x="548640" y="6355080"/>
+            <a:ext cx="11064240" cy="320040"/>
+          </a:xfrm>
+          <a:prstGeom prst="rect">
+            <a:avLst/>
+          </a:prstGeom>
+          <a:noFill/>
+        </p:spPr>
+        <p:txBody>
+          <a:bodyPr wrap="square">
+            <a:noAutofit/>
+          </a:bodyPr>
+          <a:lstStyle/>
+          <a:p>
+            <a:pPr algn="r">
+              <a:lnSpc>
+                <a:spcPts val="2200"/>
+              </a:lnSpc>
+              <a:defRPr sz="1000" b="0">
+                <a:solidFill>
+                  <a:srgbClr val="666666"/>
+                </a:solidFill>
+                <a:latin typeface="Calibri"/>
+              </a:defRPr>
+            </a:pPr>
+            <a:r>
+              <a:t>learn_uart_spi_i2c / Module 1</a:t>
+            </a:r>
+          </a:p>
+        </p:txBody>
+      </p:sp>
+    </p:spTree>
+  </p:cSld>
+  <p:clrMapOvr>
+    <a:masterClrMapping/>
+  </p:clrMapOvr>
+</p:sld>
+</file>
+
+<file path=ppt/slides/slide31.xml><?xml version="1.0" encoding="utf-8"?>
+<p:sld xmlns:a="http://schemas.openxmlformats.org/drawingml/2006/main" xmlns:p="http://schemas.openxmlformats.org/presentationml/2006/main" xmlns:r="http://schemas.openxmlformats.org/officeDocument/2006/relationships">
+  <p:cSld>
+    <p:spTree>
+      <p:nvGrpSpPr>
+        <p:cNvPr id="1" name=""/>
+        <p:cNvGrpSpPr/>
+        <p:nvPr/>
+      </p:nvGrpSpPr>
+      <p:grpSpPr/>
+      <p:sp>
+        <p:nvSpPr>
+          <p:cNvPr id="2" name="TextBox 1"/>
+          <p:cNvSpPr txBox="1"/>
+          <p:nvPr/>
+        </p:nvSpPr>
+        <p:spPr>
+          <a:xfrm>
+            <a:off x="548640" y="411480"/>
+            <a:ext cx="11064240" cy="777240"/>
+          </a:xfrm>
+          <a:prstGeom prst="rect">
+            <a:avLst/>
+          </a:prstGeom>
+          <a:noFill/>
+        </p:spPr>
+        <p:txBody>
+          <a:bodyPr wrap="square">
+            <a:noAutofit/>
+          </a:bodyPr>
+          <a:lstStyle/>
+          <a:p>
+            <a:pPr>
+              <a:lnSpc>
+                <a:spcPts val="2200"/>
+              </a:lnSpc>
+              <a:defRPr sz="2800" b="1">
+                <a:solidFill>
+                  <a:srgbClr val="1A1A2E"/>
+                </a:solidFill>
+                <a:latin typeface="Calibri"/>
+              </a:defRPr>
+            </a:pPr>
+            <a:r>
+              <a:t>Demo: Spec-to-RTL example</a:t>
+            </a:r>
+          </a:p>
+        </p:txBody>
+      </p:sp>
+      <p:sp>
+        <p:nvSpPr>
+          <p:cNvPr id="3" name="TextBox 2"/>
+          <p:cNvSpPr txBox="1"/>
+          <p:nvPr/>
+        </p:nvSpPr>
+        <p:spPr>
+          <a:xfrm>
+            <a:off x="548640" y="1051560"/>
+            <a:ext cx="11064240" cy="914400"/>
+          </a:xfrm>
+          <a:prstGeom prst="rect">
+            <a:avLst/>
+          </a:prstGeom>
+          <a:solidFill>
+            <a:srgbClr val="F4F4F4"/>
+          </a:solidFill>
+        </p:spPr>
+        <p:txBody>
+          <a:bodyPr wrap="square">
+            <a:noAutofit/>
+          </a:bodyPr>
+          <a:lstStyle/>
+          <a:p>
+            <a:pPr>
+              <a:lnSpc>
+                <a:spcPts val="2200"/>
+              </a:lnSpc>
+              <a:spcAft>
+                <a:spcPts val="200"/>
+              </a:spcAft>
+              <a:defRPr sz="2000" b="0">
+                <a:solidFill>
+                  <a:srgbClr val="333333"/>
+                </a:solidFill>
+                <a:latin typeface="Consolas"/>
+              </a:defRPr>
+            </a:pPr>
+            <a:r>
+              <a:t>$ cd module1/examples/spec_to_rtl &amp;&amp; make run</a:t>
+            </a:r>
+          </a:p>
+        </p:txBody>
+      </p:sp>
+      <p:pic>
+        <p:nvPicPr>
+          <p:cNvPr id="4" name="Picture 3" descr="spec_to_rtl.png"/>
+          <p:cNvPicPr>
+            <a:picLocks noChangeAspect="1"/>
+          </p:cNvPicPr>
+          <p:nvPr/>
+        </p:nvPicPr>
+        <p:blipFill>
+          <a:blip r:embed="rId2"/>
+          <a:stretch>
+            <a:fillRect/>
+          </a:stretch>
+        </p:blipFill>
+        <p:spPr>
+          <a:xfrm>
+            <a:off x="548640" y="1965960"/>
+            <a:ext cx="7071358" cy="3977639"/>
+          </a:xfrm>
+          <a:prstGeom prst="rect">
+            <a:avLst/>
+          </a:prstGeom>
+        </p:spPr>
+      </p:pic>
+      <p:sp>
+        <p:nvSpPr>
+          <p:cNvPr id="5" name="TextBox 4"/>
+          <p:cNvSpPr txBox="1"/>
+          <p:nvPr/>
+        </p:nvSpPr>
+        <p:spPr>
+          <a:xfrm>
+            <a:off x="548640" y="6355080"/>
+            <a:ext cx="11064240" cy="320040"/>
+          </a:xfrm>
+          <a:prstGeom prst="rect">
+            <a:avLst/>
+          </a:prstGeom>
+          <a:noFill/>
+        </p:spPr>
+        <p:txBody>
+          <a:bodyPr wrap="square">
+            <a:noAutofit/>
+          </a:bodyPr>
+          <a:lstStyle/>
+          <a:p>
+            <a:pPr algn="r">
+              <a:lnSpc>
+                <a:spcPts val="2200"/>
+              </a:lnSpc>
+              <a:defRPr sz="1000" b="0">
+                <a:solidFill>
+                  <a:srgbClr val="666666"/>
+                </a:solidFill>
+                <a:latin typeface="Calibri"/>
+              </a:defRPr>
+            </a:pPr>
+            <a:r>
+              <a:t>learn_uart_spi_i2c / Module 1</a:t>
+            </a:r>
+          </a:p>
+        </p:txBody>
+      </p:sp>
+    </p:spTree>
+  </p:cSld>
+  <p:clrMapOvr>
+    <a:masterClrMapping/>
+  </p:clrMapOvr>
+</p:sld>
+</file>
+
+<file path=ppt/slides/slide32.xml><?xml version="1.0" encoding="utf-8"?>
+<p:sld xmlns:a="http://schemas.openxmlformats.org/drawingml/2006/main" xmlns:p="http://schemas.openxmlformats.org/presentationml/2006/main" xmlns:r="http://schemas.openxmlformats.org/officeDocument/2006/relationships">
+  <p:cSld>
+    <p:spTree>
+      <p:nvGrpSpPr>
+        <p:cNvPr id="1" name=""/>
+        <p:cNvGrpSpPr/>
+        <p:nvPr/>
+      </p:nvGrpSpPr>
+      <p:grpSpPr/>
+      <p:sp>
+        <p:nvSpPr>
+          <p:cNvPr id="2" name="TextBox 1"/>
+          <p:cNvSpPr txBox="1"/>
+          <p:nvPr/>
+        </p:nvSpPr>
+        <p:spPr>
+          <a:xfrm>
+            <a:off x="548640" y="2743200"/>
+            <a:ext cx="11064240" cy="1371600"/>
+          </a:xfrm>
+          <a:prstGeom prst="rect">
+            <a:avLst/>
+          </a:prstGeom>
+          <a:noFill/>
+        </p:spPr>
+        <p:txBody>
+          <a:bodyPr wrap="square">
+            <a:noAutofit/>
+          </a:bodyPr>
+          <a:lstStyle/>
+          <a:p>
+            <a:pPr algn="ctr">
+              <a:lnSpc>
+                <a:spcPts val="2200"/>
+              </a:lnSpc>
+              <a:defRPr sz="3600" b="1">
+                <a:solidFill>
+                  <a:srgbClr val="1A1A2E"/>
+                </a:solidFill>
+                <a:latin typeface="Calibri"/>
+              </a:defRPr>
+            </a:pPr>
+            <a:r>
+              <a:t>Practice &amp; assessment</a:t>
+            </a:r>
+          </a:p>
+        </p:txBody>
+      </p:sp>
+      <p:sp>
+        <p:nvSpPr>
+          <p:cNvPr id="3" name="TextBox 2"/>
+          <p:cNvSpPr txBox="1"/>
+          <p:nvPr/>
+        </p:nvSpPr>
+        <p:spPr>
+          <a:xfrm>
+            <a:off x="548640" y="6355080"/>
+            <a:ext cx="11064240" cy="320040"/>
+          </a:xfrm>
+          <a:prstGeom prst="rect">
+            <a:avLst/>
+          </a:prstGeom>
+          <a:noFill/>
+        </p:spPr>
+        <p:txBody>
+          <a:bodyPr wrap="square">
+            <a:noAutofit/>
+          </a:bodyPr>
+          <a:lstStyle/>
+          <a:p>
+            <a:pPr algn="r">
+              <a:lnSpc>
+                <a:spcPts val="2200"/>
+              </a:lnSpc>
+              <a:defRPr sz="1000" b="0">
+                <a:solidFill>
+                  <a:srgbClr val="666666"/>
+                </a:solidFill>
+                <a:latin typeface="Calibri"/>
+              </a:defRPr>
+            </a:pPr>
+            <a:r>
+              <a:t>learn_uart_spi_i2c / Module 1</a:t>
+            </a:r>
+          </a:p>
+        </p:txBody>
+      </p:sp>
+    </p:spTree>
+  </p:cSld>
+  <p:clrMapOvr>
+    <a:masterClrMapping/>
+  </p:clrMapOvr>
+</p:sld>
+</file>
+
+<file path=ppt/slides/slide33.xml><?xml version="1.0" encoding="utf-8"?>
+<p:sld xmlns:a="http://schemas.openxmlformats.org/drawingml/2006/main" xmlns:p="http://schemas.openxmlformats.org/presentationml/2006/main" xmlns:r="http://schemas.openxmlformats.org/officeDocument/2006/relationships">
+  <p:cSld>
+    <p:spTree>
+      <p:nvGrpSpPr>
+        <p:cNvPr id="1" name=""/>
+        <p:cNvGrpSpPr/>
+        <p:nvPr/>
+      </p:nvGrpSpPr>
+      <p:grpSpPr/>
+      <p:sp>
+        <p:nvSpPr>
+          <p:cNvPr id="2" name="TextBox 1"/>
+          <p:cNvSpPr txBox="1"/>
+          <p:nvPr/>
+        </p:nvSpPr>
+        <p:spPr>
+          <a:xfrm>
+            <a:off x="548640" y="411480"/>
+            <a:ext cx="11064240" cy="777240"/>
+          </a:xfrm>
+          <a:prstGeom prst="rect">
+            <a:avLst/>
+          </a:prstGeom>
+          <a:noFill/>
+        </p:spPr>
+        <p:txBody>
+          <a:bodyPr wrap="square">
+            <a:noAutofit/>
+          </a:bodyPr>
+          <a:lstStyle/>
+          <a:p>
+            <a:pPr>
+              <a:lnSpc>
+                <a:spcPts val="2200"/>
+              </a:lnSpc>
+              <a:defRPr sz="2800" b="1">
+                <a:solidFill>
+                  <a:srgbClr val="1A1A2E"/>
+                </a:solidFill>
+                <a:latin typeface="Calibri"/>
+              </a:defRPr>
+            </a:pPr>
+            <a:r>
+              <a:t>What you should know</a:t>
+            </a:r>
+          </a:p>
+        </p:txBody>
+      </p:sp>
+      <p:sp>
+        <p:nvSpPr>
+          <p:cNvPr id="3" name="TextBox 2"/>
+          <p:cNvSpPr txBox="1"/>
+          <p:nvPr/>
+        </p:nvSpPr>
+        <p:spPr>
+          <a:xfrm>
+            <a:off x="548640" y="1234440"/>
+            <a:ext cx="11064240" cy="4937760"/>
+          </a:xfrm>
+          <a:prstGeom prst="rect">
+            <a:avLst/>
+          </a:prstGeom>
+          <a:noFill/>
+        </p:spPr>
+        <p:txBody>
+          <a:bodyPr wrap="square">
+            <a:noAutofit/>
+          </a:bodyPr>
+          <a:lstStyle/>
+          <a:p>
+            <a:pPr>
+              <a:lnSpc>
+                <a:spcPts val="2200"/>
+              </a:lnSpc>
+              <a:spcAft>
+                <a:spcPts val="1000"/>
+              </a:spcAft>
+              <a:defRPr sz="2000" b="0">
+                <a:solidFill>
+                  <a:srgbClr val="333333"/>
+                </a:solidFill>
+                <a:latin typeface="Calibri"/>
+              </a:defRPr>
+            </a:pPr>
+            <a:r>
+              <a:t>• Describe the specification → RTL flow and why a</a:t>
+            </a:r>
+          </a:p>
+          <a:p>
+            <a:pPr>
+              <a:lnSpc>
+                <a:spcPts val="2200"/>
+              </a:lnSpc>
+              <a:spcAft>
+                <a:spcPts val="1000"/>
+              </a:spcAft>
+              <a:defRPr sz="2000" b="0">
+                <a:solidFill>
+                  <a:srgbClr val="333333"/>
+                </a:solidFill>
+                <a:latin typeface="Calibri"/>
+              </a:defRPr>
+            </a:pPr>
+            <a:r>
+              <a:t>      written spec matters.</a:t>
+            </a:r>
+          </a:p>
+          <a:p>
+            <a:pPr>
+              <a:lnSpc>
+                <a:spcPts val="2200"/>
+              </a:lnSpc>
+              <a:spcAft>
+                <a:spcPts val="1000"/>
+              </a:spcAft>
+              <a:defRPr sz="2000" b="0">
+                <a:solidFill>
+                  <a:srgbClr val="333333"/>
+                </a:solidFill>
+                <a:latin typeface="Calibri"/>
+              </a:defRPr>
+            </a:pPr>
+            <a:r>
+              <a:t>• Explain what we verify (RTL vs spec) and why (cost</a:t>
+            </a:r>
+          </a:p>
+          <a:p>
+            <a:pPr>
+              <a:lnSpc>
+                <a:spcPts val="2200"/>
+              </a:lnSpc>
+              <a:spcAft>
+                <a:spcPts val="1000"/>
+              </a:spcAft>
+              <a:defRPr sz="2000" b="0">
+                <a:solidFill>
+                  <a:srgbClr val="333333"/>
+                </a:solidFill>
+                <a:latin typeface="Calibri"/>
+              </a:defRPr>
+            </a:pPr>
+            <a:r>
+              <a:t>      of bugs, repeatability).</a:t>
+            </a:r>
+          </a:p>
+          <a:p>
+            <a:pPr>
+              <a:lnSpc>
+                <a:spcPts val="2200"/>
+              </a:lnSpc>
+              <a:spcAft>
+                <a:spcPts val="1000"/>
+              </a:spcAft>
+              <a:defRPr sz="2000" b="0">
+                <a:solidFill>
+                  <a:srgbClr val="333333"/>
+                </a:solidFill>
+                <a:latin typeface="Calibri"/>
+              </a:defRPr>
+            </a:pPr>
+            <a:r>
+              <a:t>• Run the spec_to_rtl example (make run) and relate</a:t>
+            </a:r>
+          </a:p>
+          <a:p>
+            <a:pPr>
+              <a:lnSpc>
+                <a:spcPts val="2200"/>
+              </a:lnSpc>
+              <a:spcAft>
+                <a:spcPts val="1000"/>
+              </a:spcAft>
+              <a:defRPr sz="2000" b="0">
+                <a:solidFill>
+                  <a:srgbClr val="333333"/>
+                </a:solidFill>
+                <a:latin typeface="Calibri"/>
+              </a:defRPr>
+            </a:pPr>
+            <a:r>
+              <a:t>      SPEC.md, counter.v, and sim_main.cpp.</a:t>
+            </a:r>
+          </a:p>
+          <a:p>
+            <a:pPr>
+              <a:lnSpc>
+                <a:spcPts val="2200"/>
+              </a:lnSpc>
+              <a:spcAft>
+                <a:spcPts val="1000"/>
+              </a:spcAft>
+              <a:defRPr sz="2000" b="0">
+                <a:solidFill>
+                  <a:srgbClr val="333333"/>
+                </a:solidFill>
+                <a:latin typeface="Calibri"/>
+              </a:defRPr>
+            </a:pPr>
+            <a:r>
+              <a:t>• Be ready for Module 2: basic testbench patterns and</a:t>
+            </a:r>
+          </a:p>
+          <a:p>
+            <a:pPr>
+              <a:lnSpc>
+                <a:spcPts val="2200"/>
+              </a:lnSpc>
+              <a:spcAft>
+                <a:spcPts val="1000"/>
+              </a:spcAft>
+              <a:defRPr sz="2000" b="0">
+                <a:solidFill>
+                  <a:srgbClr val="333333"/>
+                </a:solidFill>
+                <a:latin typeface="Calibri"/>
+              </a:defRPr>
+            </a:pPr>
+            <a:r>
+              <a:t>      UVM+SV (agents, sequences, drivers, monitors, s…</a:t>
+            </a:r>
+          </a:p>
+        </p:txBody>
+      </p:sp>
+      <p:sp>
+        <p:nvSpPr>
+          <p:cNvPr id="4" name="TextBox 3"/>
+          <p:cNvSpPr txBox="1"/>
+          <p:nvPr/>
+        </p:nvSpPr>
+        <p:spPr>
+          <a:xfrm>
+            <a:off x="548640" y="6355080"/>
+            <a:ext cx="11064240" cy="320040"/>
+          </a:xfrm>
+          <a:prstGeom prst="rect">
+            <a:avLst/>
+          </a:prstGeom>
+          <a:noFill/>
+        </p:spPr>
+        <p:txBody>
+          <a:bodyPr wrap="square">
+            <a:noAutofit/>
+          </a:bodyPr>
+          <a:lstStyle/>
+          <a:p>
+            <a:pPr algn="r">
+              <a:lnSpc>
+                <a:spcPts val="2200"/>
+              </a:lnSpc>
+              <a:defRPr sz="1000" b="0">
+                <a:solidFill>
+                  <a:srgbClr val="666666"/>
+                </a:solidFill>
+                <a:latin typeface="Calibri"/>
+              </a:defRPr>
+            </a:pPr>
+            <a:r>
+              <a:t>learn_uart_spi_i2c / Module 1</a:t>
+            </a:r>
+          </a:p>
+        </p:txBody>
+      </p:sp>
+    </p:spTree>
+  </p:cSld>
+  <p:clrMapOvr>
+    <a:masterClrMapping/>
+  </p:clrMapOvr>
+</p:sld>
+</file>
+
+<file path=ppt/slides/slide34.xml><?xml version="1.0" encoding="utf-8"?>
+<p:sld xmlns:a="http://schemas.openxmlformats.org/drawingml/2006/main" xmlns:p="http://schemas.openxmlformats.org/presentationml/2006/main" xmlns:r="http://schemas.openxmlformats.org/officeDocument/2006/relationships">
+  <p:cSld>
+    <p:spTree>
+      <p:nvGrpSpPr>
+        <p:cNvPr id="1" name=""/>
+        <p:cNvGrpSpPr/>
+        <p:nvPr/>
+      </p:nvGrpSpPr>
+      <p:grpSpPr/>
+      <p:sp>
+        <p:nvSpPr>
+          <p:cNvPr id="2" name="TextBox 1"/>
+          <p:cNvSpPr txBox="1"/>
+          <p:nvPr/>
+        </p:nvSpPr>
+        <p:spPr>
+          <a:xfrm>
+            <a:off x="548640" y="411480"/>
+            <a:ext cx="11064240" cy="777240"/>
+          </a:xfrm>
+          <a:prstGeom prst="rect">
+            <a:avLst/>
+          </a:prstGeom>
+          <a:noFill/>
+        </p:spPr>
+        <p:txBody>
+          <a:bodyPr wrap="square">
+            <a:noAutofit/>
+          </a:bodyPr>
+          <a:lstStyle/>
+          <a:p>
+            <a:pPr>
+              <a:lnSpc>
+                <a:spcPts val="2200"/>
+              </a:lnSpc>
+              <a:defRPr sz="2800" b="1">
+                <a:solidFill>
+                  <a:srgbClr val="1A1A2E"/>
+                </a:solidFill>
+                <a:latin typeface="Calibri"/>
+              </a:defRPr>
+            </a:pPr>
+            <a:r>
+              <a:t>Exercises</a:t>
+            </a:r>
+          </a:p>
+        </p:txBody>
+      </p:sp>
+      <p:sp>
+        <p:nvSpPr>
+          <p:cNvPr id="3" name="TextBox 2"/>
+          <p:cNvSpPr txBox="1"/>
+          <p:nvPr/>
+        </p:nvSpPr>
+        <p:spPr>
+          <a:xfrm>
+            <a:off x="548640" y="1234440"/>
+            <a:ext cx="11064240" cy="4937760"/>
+          </a:xfrm>
+          <a:prstGeom prst="rect">
+            <a:avLst/>
+          </a:prstGeom>
+          <a:noFill/>
+        </p:spPr>
+        <p:txBody>
+          <a:bodyPr wrap="square">
+            <a:noAutofit/>
+          </a:bodyPr>
+          <a:lstStyle/>
+          <a:p>
+            <a:pPr>
+              <a:lnSpc>
+                <a:spcPts val="2200"/>
+              </a:lnSpc>
+              <a:spcAft>
+                <a:spcPts val="1000"/>
+              </a:spcAft>
+              <a:defRPr sz="2000" b="0">
+                <a:solidFill>
+                  <a:srgbClr val="333333"/>
+                </a:solidFill>
+                <a:latin typeface="Calibri"/>
+              </a:defRPr>
+            </a:pPr>
+            <a:r>
+              <a:t>• Read the spec and RTL</a:t>
+            </a:r>
+          </a:p>
+          <a:p>
+            <a:pPr>
+              <a:lnSpc>
+                <a:spcPts val="2200"/>
+              </a:lnSpc>
+              <a:spcAft>
+                <a:spcPts val="1000"/>
+              </a:spcAft>
+              <a:defRPr sz="2000" b="0">
+                <a:solidFill>
+                  <a:srgbClr val="333333"/>
+                </a:solidFill>
+                <a:latin typeface="Calibri"/>
+              </a:defRPr>
+            </a:pPr>
+            <a:r>
+              <a:t>• Run and extend the test</a:t>
+            </a:r>
+          </a:p>
+          <a:p>
+            <a:pPr>
+              <a:lnSpc>
+                <a:spcPts val="2200"/>
+              </a:lnSpc>
+              <a:spcAft>
+                <a:spcPts val="1000"/>
+              </a:spcAft>
+              <a:defRPr sz="2000" b="0">
+                <a:solidFill>
+                  <a:srgbClr val="333333"/>
+                </a:solidFill>
+                <a:latin typeface="Calibri"/>
+              </a:defRPr>
+            </a:pPr>
+            <a:r>
+              <a:t>• Optional: Trace</a:t>
+            </a:r>
+          </a:p>
+        </p:txBody>
+      </p:sp>
+      <p:sp>
+        <p:nvSpPr>
+          <p:cNvPr id="4" name="TextBox 3"/>
+          <p:cNvSpPr txBox="1"/>
+          <p:nvPr/>
+        </p:nvSpPr>
+        <p:spPr>
+          <a:xfrm>
+            <a:off x="548640" y="6355080"/>
+            <a:ext cx="11064240" cy="320040"/>
+          </a:xfrm>
+          <a:prstGeom prst="rect">
+            <a:avLst/>
+          </a:prstGeom>
+          <a:noFill/>
+        </p:spPr>
+        <p:txBody>
+          <a:bodyPr wrap="square">
+            <a:noAutofit/>
+          </a:bodyPr>
+          <a:lstStyle/>
+          <a:p>
+            <a:pPr algn="r">
+              <a:lnSpc>
+                <a:spcPts val="2200"/>
+              </a:lnSpc>
+              <a:defRPr sz="1000" b="0">
+                <a:solidFill>
+                  <a:srgbClr val="666666"/>
+                </a:solidFill>
+                <a:latin typeface="Calibri"/>
+              </a:defRPr>
+            </a:pPr>
+            <a:r>
+              <a:t>learn_uart_spi_i2c / Module 1</a:t>
+            </a:r>
+          </a:p>
+        </p:txBody>
+      </p:sp>
+    </p:spTree>
+  </p:cSld>
+  <p:clrMapOvr>
+    <a:masterClrMapping/>
+  </p:clrMapOvr>
+</p:sld>
+</file>
+
+<file path=ppt/slides/slide35.xml><?xml version="1.0" encoding="utf-8"?>
+<p:sld xmlns:a="http://schemas.openxmlformats.org/drawingml/2006/main" xmlns:p="http://schemas.openxmlformats.org/presentationml/2006/main" xmlns:r="http://schemas.openxmlformats.org/officeDocument/2006/relationships">
+  <p:cSld>
+    <p:spTree>
+      <p:nvGrpSpPr>
+        <p:cNvPr id="1" name=""/>
+        <p:cNvGrpSpPr/>
+        <p:nvPr/>
+      </p:nvGrpSpPr>
+      <p:grpSpPr/>
+      <p:sp>
+        <p:nvSpPr>
+          <p:cNvPr id="2" name="TextBox 1"/>
+          <p:cNvSpPr txBox="1"/>
+          <p:nvPr/>
+        </p:nvSpPr>
+        <p:spPr>
+          <a:xfrm>
+            <a:off x="548640" y="411480"/>
+            <a:ext cx="11064240" cy="777240"/>
+          </a:xfrm>
+          <a:prstGeom prst="rect">
+            <a:avLst/>
+          </a:prstGeom>
+          <a:noFill/>
+        </p:spPr>
+        <p:txBody>
+          <a:bodyPr wrap="square">
+            <a:noAutofit/>
+          </a:bodyPr>
+          <a:lstStyle/>
+          <a:p>
+            <a:pPr>
+              <a:lnSpc>
+                <a:spcPts val="2200"/>
+              </a:lnSpc>
+              <a:defRPr sz="2800" b="1">
+                <a:solidFill>
+                  <a:srgbClr val="1A1A2E"/>
+                </a:solidFill>
+                <a:latin typeface="Calibri"/>
+              </a:defRPr>
+            </a:pPr>
+            <a:r>
+              <a:t>Assessment checklist</a:t>
+            </a:r>
+          </a:p>
+        </p:txBody>
+      </p:sp>
+      <p:sp>
+        <p:nvSpPr>
+          <p:cNvPr id="3" name="TextBox 2"/>
+          <p:cNvSpPr txBox="1"/>
+          <p:nvPr/>
+        </p:nvSpPr>
+        <p:spPr>
+          <a:xfrm>
+            <a:off x="548640" y="1234440"/>
+            <a:ext cx="11064240" cy="4937760"/>
+          </a:xfrm>
+          <a:prstGeom prst="rect">
+            <a:avLst/>
+          </a:prstGeom>
+          <a:noFill/>
+        </p:spPr>
+        <p:txBody>
+          <a:bodyPr wrap="square">
+            <a:noAutofit/>
+          </a:bodyPr>
+          <a:lstStyle/>
+          <a:p>
+            <a:pPr>
+              <a:lnSpc>
+                <a:spcPts val="2200"/>
+              </a:lnSpc>
+              <a:spcAft>
+                <a:spcPts val="1000"/>
+              </a:spcAft>
+              <a:defRPr sz="2000" b="0">
+                <a:solidFill>
+                  <a:srgbClr val="333333"/>
+                </a:solidFill>
+                <a:latin typeface="Calibri"/>
+              </a:defRPr>
+            </a:pPr>
+            <a:r>
+              <a:t>• Can explain the spec → RTL flow and the role of a</a:t>
+            </a:r>
+          </a:p>
+          <a:p>
+            <a:pPr>
+              <a:lnSpc>
+                <a:spcPts val="2200"/>
+              </a:lnSpc>
+              <a:spcAft>
+                <a:spcPts val="1000"/>
+              </a:spcAft>
+              <a:defRPr sz="2000" b="0">
+                <a:solidFill>
+                  <a:srgbClr val="333333"/>
+                </a:solidFill>
+                <a:latin typeface="Calibri"/>
+              </a:defRPr>
+            </a:pPr>
+            <a:r>
+              <a:t>      written specification.</a:t>
+            </a:r>
+          </a:p>
+          <a:p>
+            <a:pPr>
+              <a:lnSpc>
+                <a:spcPts val="2200"/>
+              </a:lnSpc>
+              <a:spcAft>
+                <a:spcPts val="1000"/>
+              </a:spcAft>
+              <a:defRPr sz="2000" b="0">
+                <a:solidFill>
+                  <a:srgbClr val="333333"/>
+                </a:solidFill>
+                <a:latin typeface="Calibri"/>
+              </a:defRPr>
+            </a:pPr>
+            <a:r>
+              <a:t>• Can explain what we verify (RTL vs spec) and why</a:t>
+            </a:r>
+          </a:p>
+          <a:p>
+            <a:pPr>
+              <a:lnSpc>
+                <a:spcPts val="2200"/>
+              </a:lnSpc>
+              <a:spcAft>
+                <a:spcPts val="1000"/>
+              </a:spcAft>
+              <a:defRPr sz="2000" b="0">
+                <a:solidFill>
+                  <a:srgbClr val="333333"/>
+                </a:solidFill>
+                <a:latin typeface="Calibri"/>
+              </a:defRPr>
+            </a:pPr>
+            <a:r>
+              <a:t>      verification is done.</a:t>
+            </a:r>
+          </a:p>
+          <a:p>
+            <a:pPr>
+              <a:lnSpc>
+                <a:spcPts val="2200"/>
+              </a:lnSpc>
+              <a:spcAft>
+                <a:spcPts val="1000"/>
+              </a:spcAft>
+              <a:defRPr sz="2000" b="0">
+                <a:solidFill>
+                  <a:srgbClr val="333333"/>
+                </a:solidFill>
+                <a:latin typeface="Calibri"/>
+              </a:defRPr>
+            </a:pPr>
+            <a:r>
+              <a:t>• Can run the spec_to_rtl example and describe what</a:t>
+            </a:r>
+          </a:p>
+          <a:p>
+            <a:pPr>
+              <a:lnSpc>
+                <a:spcPts val="2200"/>
+              </a:lnSpc>
+              <a:spcAft>
+                <a:spcPts val="1000"/>
+              </a:spcAft>
+              <a:defRPr sz="2000" b="0">
+                <a:solidFill>
+                  <a:srgbClr val="333333"/>
+                </a:solidFill>
+                <a:latin typeface="Calibri"/>
+              </a:defRPr>
+            </a:pPr>
+            <a:r>
+              <a:t>      SPEC.md, counter.v, and sim_main.cpp do.</a:t>
+            </a:r>
+          </a:p>
+          <a:p>
+            <a:pPr>
+              <a:lnSpc>
+                <a:spcPts val="2200"/>
+              </a:lnSpc>
+              <a:spcAft>
+                <a:spcPts val="1000"/>
+              </a:spcAft>
+              <a:defRPr sz="2000" b="0">
+                <a:solidFill>
+                  <a:srgbClr val="333333"/>
+                </a:solidFill>
+                <a:latin typeface="Calibri"/>
+              </a:defRPr>
+            </a:pPr>
+            <a:r>
+              <a:t>• Ready to move to Module 2 (basic TB, UVM+SV,</a:t>
+            </a:r>
+          </a:p>
+          <a:p>
+            <a:pPr>
+              <a:lnSpc>
+                <a:spcPts val="2200"/>
+              </a:lnSpc>
+              <a:spcAft>
+                <a:spcPts val="1000"/>
+              </a:spcAft>
+              <a:defRPr sz="2000" b="0">
+                <a:solidFill>
+                  <a:srgbClr val="333333"/>
+                </a:solidFill>
+                <a:latin typeface="Calibri"/>
+              </a:defRPr>
+            </a:pPr>
+            <a:r>
+              <a:t>      toolchain).</a:t>
+            </a:r>
+          </a:p>
+        </p:txBody>
+      </p:sp>
+      <p:sp>
+        <p:nvSpPr>
+          <p:cNvPr id="4" name="TextBox 3"/>
+          <p:cNvSpPr txBox="1"/>
+          <p:nvPr/>
+        </p:nvSpPr>
+        <p:spPr>
+          <a:xfrm>
+            <a:off x="548640" y="6355080"/>
+            <a:ext cx="11064240" cy="320040"/>
+          </a:xfrm>
+          <a:prstGeom prst="rect">
+            <a:avLst/>
+          </a:prstGeom>
+          <a:noFill/>
+        </p:spPr>
+        <p:txBody>
+          <a:bodyPr wrap="square">
+            <a:noAutofit/>
+          </a:bodyPr>
+          <a:lstStyle/>
+          <a:p>
+            <a:pPr algn="r">
+              <a:lnSpc>
+                <a:spcPts val="2200"/>
+              </a:lnSpc>
+              <a:defRPr sz="1000" b="0">
+                <a:solidFill>
+                  <a:srgbClr val="666666"/>
+                </a:solidFill>
+                <a:latin typeface="Calibri"/>
+              </a:defRPr>
+            </a:pPr>
+            <a:r>
+              <a:t>learn_uart_spi_i2c / Module 1</a:t>
+            </a:r>
+          </a:p>
+        </p:txBody>
+      </p:sp>
+    </p:spTree>
+  </p:cSld>
+  <p:clrMapOvr>
+    <a:masterClrMapping/>
+  </p:clrMapOvr>
+</p:sld>
+</file>
+
+<file path=ppt/slides/slide36.xml><?xml version="1.0" encoding="utf-8"?>
+<p:sld xmlns:a="http://schemas.openxmlformats.org/drawingml/2006/main" xmlns:p="http://schemas.openxmlformats.org/presentationml/2006/main" xmlns:r="http://schemas.openxmlformats.org/officeDocument/2006/relationships">
+  <p:cSld>
+    <p:spTree>
+      <p:nvGrpSpPr>
+        <p:cNvPr id="1" name=""/>
+        <p:cNvGrpSpPr/>
+        <p:nvPr/>
+      </p:nvGrpSpPr>
+      <p:grpSpPr/>
+      <p:sp>
+        <p:nvSpPr>
+          <p:cNvPr id="2" name="TextBox 1"/>
+          <p:cNvSpPr txBox="1"/>
+          <p:nvPr/>
+        </p:nvSpPr>
+        <p:spPr>
+          <a:xfrm>
+            <a:off x="548640" y="411480"/>
+            <a:ext cx="11064240" cy="777240"/>
+          </a:xfrm>
+          <a:prstGeom prst="rect">
+            <a:avLst/>
+          </a:prstGeom>
+          <a:noFill/>
+        </p:spPr>
+        <p:txBody>
+          <a:bodyPr wrap="square">
+            <a:noAutofit/>
+          </a:bodyPr>
+          <a:lstStyle/>
+          <a:p>
+            <a:pPr>
+              <a:lnSpc>
+                <a:spcPts val="2200"/>
+              </a:lnSpc>
+              <a:defRPr sz="2800" b="1">
+                <a:solidFill>
+                  <a:srgbClr val="1A1A2E"/>
+                </a:solidFill>
+                <a:latin typeface="Calibri"/>
+              </a:defRPr>
+            </a:pPr>
+            <a:r>
+              <a:t>Summary &amp; next steps</a:t>
+            </a:r>
+          </a:p>
+        </p:txBody>
+      </p:sp>
+      <p:sp>
+        <p:nvSpPr>
+          <p:cNvPr id="3" name="TextBox 2"/>
+          <p:cNvSpPr txBox="1"/>
+          <p:nvPr/>
+        </p:nvSpPr>
+        <p:spPr>
+          <a:xfrm>
+            <a:off x="548640" y="1234440"/>
+            <a:ext cx="11064240" cy="4937760"/>
+          </a:xfrm>
+          <a:prstGeom prst="rect">
+            <a:avLst/>
+          </a:prstGeom>
+          <a:noFill/>
+        </p:spPr>
+        <p:txBody>
+          <a:bodyPr wrap="square">
+            <a:noAutofit/>
+          </a:bodyPr>
+          <a:lstStyle/>
+          <a:p>
+            <a:pPr>
+              <a:lnSpc>
+                <a:spcPts val="2200"/>
+              </a:lnSpc>
+              <a:spcAft>
+                <a:spcPts val="1000"/>
+              </a:spcAft>
+              <a:defRPr sz="2000" b="0">
+                <a:solidFill>
+                  <a:srgbClr val="333333"/>
+                </a:solidFill>
+                <a:latin typeface="Calibri"/>
+              </a:defRPr>
+            </a:pPr>
+            <a:r>
+              <a:t>• Understand the specification → RTL design flow,</a:t>
+            </a:r>
+          </a:p>
+          <a:p>
+            <a:pPr>
+              <a:lnSpc>
+                <a:spcPts val="2200"/>
+              </a:lnSpc>
+              <a:spcAft>
+                <a:spcPts val="1000"/>
+              </a:spcAft>
+              <a:defRPr sz="2000" b="0">
+                <a:solidFill>
+                  <a:srgbClr val="333333"/>
+                </a:solidFill>
+                <a:latin typeface="Calibri"/>
+              </a:defRPr>
+            </a:pPr>
+            <a:r>
+              <a:t>      design methodology, and why we verify.</a:t>
+            </a:r>
+          </a:p>
+          <a:p>
+            <a:pPr>
+              <a:lnSpc>
+                <a:spcPts val="2200"/>
+              </a:lnSpc>
+              <a:spcAft>
+                <a:spcPts val="1000"/>
+              </a:spcAft>
+              <a:defRPr sz="2000" b="0">
+                <a:solidFill>
+                  <a:srgbClr val="333333"/>
+                </a:solidFill>
+                <a:latin typeface="Calibri"/>
+              </a:defRPr>
+            </a:pPr>
+            <a:r>
+              <a:t>• Complete module1/CHECKLIST.md</a:t>
+            </a:r>
+          </a:p>
+          <a:p>
+            <a:pPr>
+              <a:lnSpc>
+                <a:spcPts val="2200"/>
+              </a:lnSpc>
+              <a:spcAft>
+                <a:spcPts val="1000"/>
+              </a:spcAft>
+              <a:defRPr sz="2000" b="0">
+                <a:solidFill>
+                  <a:srgbClr val="333333"/>
+                </a:solidFill>
+                <a:latin typeface="Calibri"/>
+              </a:defRPr>
+            </a:pPr>
+            <a:r>
+              <a:t>• Review module1/EXAMPLES.md and run each lab</a:t>
+            </a:r>
+          </a:p>
+          <a:p>
+            <a:pPr>
+              <a:lnSpc>
+                <a:spcPts val="2200"/>
+              </a:lnSpc>
+              <a:spcAft>
+                <a:spcPts val="1000"/>
+              </a:spcAft>
+              <a:defRPr sz="2000" b="0">
+                <a:solidFill>
+                  <a:srgbClr val="333333"/>
+                </a:solidFill>
+                <a:latin typeface="Calibri"/>
+              </a:defRPr>
+            </a:pPr>
+            <a:r>
+              <a:t>• Next: Design &amp; Verification Methodology (Part 2)</a:t>
+            </a:r>
+          </a:p>
+        </p:txBody>
+      </p:sp>
+      <p:sp>
+        <p:nvSpPr>
+          <p:cNvPr id="4" name="TextBox 3"/>
+          <p:cNvSpPr txBox="1"/>
+          <p:nvPr/>
+        </p:nvSpPr>
+        <p:spPr>
+          <a:xfrm>
+            <a:off x="548640" y="6355080"/>
+            <a:ext cx="11064240" cy="320040"/>
+          </a:xfrm>
+          <a:prstGeom prst="rect">
+            <a:avLst/>
+          </a:prstGeom>
+          <a:noFill/>
+        </p:spPr>
+        <p:txBody>
+          <a:bodyPr wrap="square">
+            <a:noAutofit/>
+          </a:bodyPr>
+          <a:lstStyle/>
+          <a:p>
+            <a:pPr algn="r">
+              <a:lnSpc>
+                <a:spcPts val="2200"/>
+              </a:lnSpc>
+              <a:defRPr sz="1000" b="0">
+                <a:solidFill>
+                  <a:srgbClr val="666666"/>
+                </a:solidFill>
+                <a:latin typeface="Calibri"/>
+              </a:defRPr>
+            </a:pPr>
+            <a:r>
+              <a:t>learn_uart_spi_i2c / Module 1</a:t>
+            </a:r>
+          </a:p>
+        </p:txBody>
+      </p:sp>
+    </p:spTree>
+  </p:cSld>
+  <p:clrMapOvr>
+    <a:masterClrMapping/>
+  </p:clrMapOvr>
+</p:sld>
+</file>
+
 <file path=ppt/slides/slide4.xml><?xml version="1.0" encoding="utf-8"?>
 <p:sld xmlns:a="http://schemas.openxmlformats.org/drawingml/2006/main" xmlns:p="http://schemas.openxmlformats.org/presentationml/2006/main" xmlns:r="http://schemas.openxmlformats.org/officeDocument/2006/relationships">
   <p:cSld>
@@ -6832,7 +10368,7 @@
               </a:defRPr>
             </a:pPr>
             <a:r>
-              <a:t>Syllabus topics</a:t>
+              <a:t>How to learn this module</a:t>
             </a:r>
           </a:p>
         </p:txBody>
@@ -6928,7 +10464,7 @@
               </a:defRPr>
             </a:pPr>
             <a:r>
-              <a:t>1. Specification → RTL Design Flow</a:t>
+              <a:t>Suggested learning path</a:t>
             </a:r>
           </a:p>
         </p:txBody>
@@ -6970,7 +10506,7 @@
               </a:defRPr>
             </a:pPr>
             <a:r>
-              <a:t>• Specification: Document interface (ports, widths,</a:t>
+              <a:t>• Read UNDERSTANDING_THE_SPEC.md — how to read</a:t>
             </a:r>
           </a:p>
           <a:p>
@@ -6989,7 +10525,7 @@
               </a:defRPr>
             </a:pPr>
             <a:r>
-              <a:t>      direction), behavior (reset, enable, state transi…</a:t>
+              <a:t>      interface, behavior, and timing in a spec.</a:t>
             </a:r>
           </a:p>
           <a:p>
@@ -7008,7 +10544,7 @@
               </a:defRPr>
             </a:pPr>
             <a:r>
-              <a:t>• RTL: Implement the spec in Verilog/SystemVerilog;</a:t>
+              <a:t>• Read SPEC_TO_RTL_GUIDE.md — mapping spec sections to</a:t>
             </a:r>
           </a:p>
           <a:p>
@@ -7027,7 +10563,7 @@
               </a:defRPr>
             </a:pPr>
             <a:r>
-              <a:t>      each requirement in the spec should map to clear…</a:t>
+              <a:t>      RTL structure.</a:t>
             </a:r>
           </a:p>
           <a:p>
@@ -7046,7 +10582,7 @@
               </a:defRPr>
             </a:pPr>
             <a:r>
-              <a:t>• Traceability: Being able to point from a line in the</a:t>
+              <a:t>• Skim Design Architecture and Verification sections</a:t>
             </a:r>
           </a:p>
           <a:p>
@@ -7065,7 +10601,45 @@
               </a:defRPr>
             </a:pPr>
             <a:r>
-              <a:t>      spec to the RTL that implements it (and vice v…</a:t>
+              <a:t>      below, then run the spec_to_rtl example.</a:t>
+            </a:r>
+          </a:p>
+          <a:p>
+            <a:pPr>
+              <a:lnSpc>
+                <a:spcPts val="2200"/>
+              </a:lnSpc>
+              <a:spcAft>
+                <a:spcPts val="1000"/>
+              </a:spcAft>
+              <a:defRPr sz="2000" b="0">
+                <a:solidFill>
+                  <a:srgbClr val="333333"/>
+                </a:solidFill>
+                <a:latin typeface="Calibri"/>
+              </a:defRPr>
+            </a:pPr>
+            <a:r>
+              <a:t>• Trace one requirement in SPEC.md to a line in</a:t>
+            </a:r>
+          </a:p>
+          <a:p>
+            <a:pPr>
+              <a:lnSpc>
+                <a:spcPts val="2200"/>
+              </a:lnSpc>
+              <a:spcAft>
+                <a:spcPts val="1000"/>
+              </a:spcAft>
+              <a:defRPr sz="2000" b="0">
+                <a:solidFill>
+                  <a:srgbClr val="333333"/>
+                </a:solidFill>
+                <a:latin typeface="Calibri"/>
+              </a:defRPr>
+            </a:pPr>
+            <a:r>
+              <a:t>      `dut/counter.v` and to a check in `sim_main.cpp`.</a:t>
             </a:r>
           </a:p>
         </p:txBody>
@@ -7135,8 +10709,8 @@
         </p:nvSpPr>
         <p:spPr>
           <a:xfrm>
-            <a:off x="548640" y="411480"/>
-            <a:ext cx="11064240" cy="777240"/>
+            <a:off x="548640" y="2743200"/>
+            <a:ext cx="11064240" cy="1371600"/>
           </a:xfrm>
           <a:prstGeom prst="rect">
             <a:avLst/>
@@ -7149,11 +10723,11 @@
           </a:bodyPr>
           <a:lstStyle/>
           <a:p>
-            <a:pPr>
-              <a:lnSpc>
-                <a:spcPts val="2200"/>
-              </a:lnSpc>
-              <a:defRPr sz="2800" b="1">
+            <a:pPr algn="ctr">
+              <a:lnSpc>
+                <a:spcPts val="2200"/>
+              </a:lnSpc>
+              <a:defRPr sz="3600" b="1">
                 <a:solidFill>
                   <a:srgbClr val="1A1A2E"/>
                 </a:solidFill>
@@ -7161,7 +10735,7 @@
               </a:defRPr>
             </a:pPr>
             <a:r>
-              <a:t>2. Design Methodology</a:t>
+              <a:t>Design architecture</a:t>
             </a:r>
           </a:p>
         </p:txBody>
@@ -7169,143 +10743,6 @@
       <p:sp>
         <p:nvSpPr>
           <p:cNvPr id="3" name="TextBox 2"/>
-          <p:cNvSpPr txBox="1"/>
-          <p:nvPr/>
-        </p:nvSpPr>
-        <p:spPr>
-          <a:xfrm>
-            <a:off x="548640" y="1234440"/>
-            <a:ext cx="11064240" cy="4937760"/>
-          </a:xfrm>
-          <a:prstGeom prst="rect">
-            <a:avLst/>
-          </a:prstGeom>
-          <a:noFill/>
-        </p:spPr>
-        <p:txBody>
-          <a:bodyPr wrap="square">
-            <a:noAutofit/>
-          </a:bodyPr>
-          <a:lstStyle/>
-          <a:p>
-            <a:pPr>
-              <a:lnSpc>
-                <a:spcPts val="2200"/>
-              </a:lnSpc>
-              <a:spcAft>
-                <a:spcPts val="1000"/>
-              </a:spcAft>
-              <a:defRPr sz="2000" b="0">
-                <a:solidFill>
-                  <a:srgbClr val="333333"/>
-                </a:solidFill>
-                <a:latin typeface="Calibri"/>
-              </a:defRPr>
-            </a:pPr>
-            <a:r>
-              <a:t>• Single block: One spec, one (or a few) RTL files,</a:t>
-            </a:r>
-          </a:p>
-          <a:p>
-            <a:pPr>
-              <a:lnSpc>
-                <a:spcPts val="2200"/>
-              </a:lnSpc>
-              <a:spcAft>
-                <a:spcPts val="1000"/>
-              </a:spcAft>
-              <a:defRPr sz="2000" b="0">
-                <a:solidFill>
-                  <a:srgbClr val="333333"/>
-                </a:solidFill>
-                <a:latin typeface="Calibri"/>
-              </a:defRPr>
-            </a:pPr>
-            <a:r>
-              <a:t>      one testbench.</a:t>
-            </a:r>
-          </a:p>
-          <a:p>
-            <a:pPr>
-              <a:lnSpc>
-                <a:spcPts val="2200"/>
-              </a:lnSpc>
-              <a:spcAft>
-                <a:spcPts val="1000"/>
-              </a:spcAft>
-              <a:defRPr sz="2000" b="0">
-                <a:solidFill>
-                  <a:srgbClr val="333333"/>
-                </a:solidFill>
-                <a:latin typeface="Calibri"/>
-              </a:defRPr>
-            </a:pPr>
-            <a:r>
-              <a:t>• Reuse: The same flow (spec → RTL → testbench) scales</a:t>
-            </a:r>
-          </a:p>
-          <a:p>
-            <a:pPr>
-              <a:lnSpc>
-                <a:spcPts val="2200"/>
-              </a:lnSpc>
-              <a:spcAft>
-                <a:spcPts val="1000"/>
-              </a:spcAft>
-              <a:defRPr sz="2000" b="0">
-                <a:solidFill>
-                  <a:srgbClr val="333333"/>
-                </a:solidFill>
-                <a:latin typeface="Calibri"/>
-              </a:defRPr>
-            </a:pPr>
-            <a:r>
-              <a:t>      to protocol blocks (UART, SPI, I²C) in Modules…</a:t>
-            </a:r>
-          </a:p>
-          <a:p>
-            <a:pPr>
-              <a:lnSpc>
-                <a:spcPts val="2200"/>
-              </a:lnSpc>
-              <a:spcAft>
-                <a:spcPts val="1000"/>
-              </a:spcAft>
-              <a:defRPr sz="2000" b="0">
-                <a:solidFill>
-                  <a:srgbClr val="333333"/>
-                </a:solidFill>
-                <a:latin typeface="Calibri"/>
-              </a:defRPr>
-            </a:pPr>
-            <a:r>
-              <a:t>• Documentation: Keep SPEC.md (or similar) next to the</a:t>
-            </a:r>
-          </a:p>
-          <a:p>
-            <a:pPr>
-              <a:lnSpc>
-                <a:spcPts val="2200"/>
-              </a:lnSpc>
-              <a:spcAft>
-                <a:spcPts val="1000"/>
-              </a:spcAft>
-              <a:defRPr sz="2000" b="0">
-                <a:solidFill>
-                  <a:srgbClr val="333333"/>
-                </a:solidFill>
-                <a:latin typeface="Calibri"/>
-              </a:defRPr>
-            </a:pPr>
-            <a:r>
-              <a:t>      RTL so that reviewers and verification can che…</a:t>
-            </a:r>
-          </a:p>
-        </p:txBody>
-      </p:sp>
-      <p:sp>
-        <p:nvSpPr>
-          <p:cNvPr id="4" name="TextBox 3"/>
           <p:cNvSpPr txBox="1"/>
           <p:nvPr/>
         </p:nvSpPr>
@@ -7394,21 +10831,45 @@
               </a:defRPr>
             </a:pPr>
             <a:r>
-              <a:t>3. Intro to Verification: What We Verify, and Why</a:t>
-            </a:r>
-          </a:p>
-        </p:txBody>
-      </p:sp>
-      <p:sp>
-        <p:nvSpPr>
-          <p:cNvPr id="3" name="TextBox 2"/>
+              <a:t>RTL / block architecture</a:t>
+            </a:r>
+          </a:p>
+        </p:txBody>
+      </p:sp>
+      <p:pic>
+        <p:nvPicPr>
+          <p:cNvPr id="3" name="Picture 2" descr="rtl_architecture.png"/>
+          <p:cNvPicPr>
+            <a:picLocks noChangeAspect="1"/>
+          </p:cNvPicPr>
+          <p:nvPr/>
+        </p:nvPicPr>
+        <p:blipFill>
+          <a:blip r:embed="rId2"/>
+          <a:stretch>
+            <a:fillRect/>
+          </a:stretch>
+        </p:blipFill>
+        <p:spPr>
+          <a:xfrm>
+            <a:off x="548640" y="1143000"/>
+            <a:ext cx="8128000" cy="4572000"/>
+          </a:xfrm>
+          <a:prstGeom prst="rect">
+            <a:avLst/>
+          </a:prstGeom>
+        </p:spPr>
+      </p:pic>
+      <p:sp>
+        <p:nvSpPr>
+          <p:cNvPr id="4" name="TextBox 3"/>
           <p:cNvSpPr txBox="1"/>
           <p:nvPr/>
         </p:nvSpPr>
         <p:spPr>
           <a:xfrm>
-            <a:off x="548640" y="1234440"/>
-            <a:ext cx="11064240" cy="4937760"/>
+            <a:off x="548640" y="5897880"/>
+            <a:ext cx="11064240" cy="411480"/>
           </a:xfrm>
           <a:prstGeom prst="rect">
             <a:avLst/>
@@ -7425,10 +10886,7 @@
               <a:lnSpc>
                 <a:spcPts val="2200"/>
               </a:lnSpc>
-              <a:spcAft>
-                <a:spcPts val="1000"/>
-              </a:spcAft>
-              <a:defRPr sz="2000" b="0">
+              <a:defRPr sz="1200" b="0">
                 <a:solidFill>
                   <a:srgbClr val="333333"/>
                 </a:solidFill>
@@ -7436,128 +10894,14 @@
               </a:defRPr>
             </a:pPr>
             <a:r>
-              <a:t>• What we verify: That the RTL matches the</a:t>
-            </a:r>
-          </a:p>
-          <a:p>
-            <a:pPr>
-              <a:lnSpc>
-                <a:spcPts val="2200"/>
-              </a:lnSpc>
-              <a:spcAft>
-                <a:spcPts val="1000"/>
-              </a:spcAft>
-              <a:defRPr sz="2000" b="0">
-                <a:solidFill>
-                  <a:srgbClr val="333333"/>
-                </a:solidFill>
-                <a:latin typeface="Calibri"/>
-              </a:defRPr>
-            </a:pPr>
-            <a:r>
-              <a:t>      specification (correct function, reset, enable,</a:t>
-            </a:r>
-          </a:p>
-          <a:p>
-            <a:pPr>
-              <a:lnSpc>
-                <a:spcPts val="2200"/>
-              </a:lnSpc>
-              <a:spcAft>
-                <a:spcPts val="1000"/>
-              </a:spcAft>
-              <a:defRPr sz="2000" b="0">
-                <a:solidFill>
-                  <a:srgbClr val="333333"/>
-                </a:solidFill>
-                <a:latin typeface="Calibri"/>
-              </a:defRPr>
-            </a:pPr>
-            <a:r>
-              <a:t>      boundaries…</a:t>
-            </a:r>
-          </a:p>
-          <a:p>
-            <a:pPr>
-              <a:lnSpc>
-                <a:spcPts val="2200"/>
-              </a:lnSpc>
-              <a:spcAft>
-                <a:spcPts val="1000"/>
-              </a:spcAft>
-              <a:defRPr sz="2000" b="0">
-                <a:solidFill>
-                  <a:srgbClr val="333333"/>
-                </a:solidFill>
-                <a:latin typeface="Calibri"/>
-              </a:defRPr>
-            </a:pPr>
-            <a:r>
-              <a:t>• Why we verify: Finding bugs in RTL is far cheaper</a:t>
-            </a:r>
-          </a:p>
-          <a:p>
-            <a:pPr>
-              <a:lnSpc>
-                <a:spcPts val="2200"/>
-              </a:lnSpc>
-              <a:spcAft>
-                <a:spcPts val="1000"/>
-              </a:spcAft>
-              <a:defRPr sz="2000" b="0">
-                <a:solidFill>
-                  <a:srgbClr val="333333"/>
-                </a:solidFill>
-                <a:latin typeface="Calibri"/>
-              </a:defRPr>
-            </a:pPr>
-            <a:r>
-              <a:t>      than finding them in silicon or in system integra…</a:t>
-            </a:r>
-          </a:p>
-          <a:p>
-            <a:pPr>
-              <a:lnSpc>
-                <a:spcPts val="2200"/>
-              </a:lnSpc>
-              <a:spcAft>
-                <a:spcPts val="1000"/>
-              </a:spcAft>
-              <a:defRPr sz="2000" b="0">
-                <a:solidFill>
-                  <a:srgbClr val="333333"/>
-                </a:solidFill>
-                <a:latin typeface="Calibri"/>
-              </a:defRPr>
-            </a:pPr>
-            <a:r>
-              <a:t>• Directed test: A simple test that drives specific</a:t>
-            </a:r>
-          </a:p>
-          <a:p>
-            <a:pPr>
-              <a:lnSpc>
-                <a:spcPts val="2200"/>
-              </a:lnSpc>
-              <a:spcAft>
-                <a:spcPts val="1000"/>
-              </a:spcAft>
-              <a:defRPr sz="2000" b="0">
-                <a:solidFill>
-                  <a:srgbClr val="333333"/>
-                </a:solidFill>
-                <a:latin typeface="Calibri"/>
-              </a:defRPr>
-            </a:pPr>
-            <a:r>
-              <a:t>      inputs (e.g., reset, then 10 enabled cycles) and…</a:t>
-            </a:r>
-          </a:p>
-        </p:txBody>
-      </p:sp>
-      <p:sp>
-        <p:nvSpPr>
-          <p:cNvPr id="4" name="TextBox 3"/>
+              <a:t>Module 1: DUT / block hierarchy (see module1/examples/).</a:t>
+            </a:r>
+          </a:p>
+        </p:txBody>
+      </p:sp>
+      <p:sp>
+        <p:nvSpPr>
+          <p:cNvPr id="5" name="TextBox 4"/>
           <p:cNvSpPr txBox="1"/>
           <p:nvPr/>
         </p:nvSpPr>
